--- a/Team A-Group PPT.pptx
+++ b/Team A-Group PPT.pptx
@@ -5,18 +5,22 @@
     <p:sldMasterId id="2147483648" r:id="rId1"/>
   </p:sldMasterIdLst>
   <p:notesMasterIdLst>
-    <p:notesMasterId r:id="rId11"/>
+    <p:notesMasterId r:id="rId15"/>
   </p:notesMasterIdLst>
   <p:sldIdLst>
     <p:sldId id="256" r:id="rId2"/>
     <p:sldId id="257" r:id="rId3"/>
     <p:sldId id="265" r:id="rId4"/>
     <p:sldId id="258" r:id="rId5"/>
-    <p:sldId id="259" r:id="rId6"/>
-    <p:sldId id="260" r:id="rId7"/>
-    <p:sldId id="261" r:id="rId8"/>
-    <p:sldId id="262" r:id="rId9"/>
-    <p:sldId id="263" r:id="rId10"/>
+    <p:sldId id="266" r:id="rId6"/>
+    <p:sldId id="267" r:id="rId7"/>
+    <p:sldId id="268" r:id="rId8"/>
+    <p:sldId id="269" r:id="rId9"/>
+    <p:sldId id="259" r:id="rId10"/>
+    <p:sldId id="260" r:id="rId11"/>
+    <p:sldId id="261" r:id="rId12"/>
+    <p:sldId id="262" r:id="rId13"/>
+    <p:sldId id="263" r:id="rId14"/>
   </p:sldIdLst>
   <p:sldSz cx="9144000" cy="5143500" type="screen16x9"/>
   <p:notesSz cx="5143500" cy="9144000"/>
@@ -242,7 +246,7 @@
           <a:p>
             <a:fld id="{FF5840A1-B0A0-46A5-B54E-A85918D77DC3}" type="datetimeFigureOut">
               <a:rPr lang="en-IN" smtClean="0"/>
-              <a:t>16-08-2026</a:t>
+              <a:t>18-09-2026</a:t>
             </a:fld>
             <a:endParaRPr lang="en-IN"/>
           </a:p>
@@ -911,7 +915,7 @@
           <a:p>
             <a:fld id="{F7021451-1387-4CA6-816F-3879F97B5CBC}" type="slidenum">
               <a:rPr lang="en-US"/>
-              <a:t>5</a:t>
+              <a:t>9</a:t>
             </a:fld>
             <a:endParaRPr lang="en-US"/>
           </a:p>
@@ -995,7 +999,7 @@
           <a:p>
             <a:fld id="{F7021451-1387-4CA6-816F-3879F97B5CBC}" type="slidenum">
               <a:rPr lang="en-US"/>
-              <a:t>6</a:t>
+              <a:t>10</a:t>
             </a:fld>
             <a:endParaRPr lang="en-US"/>
           </a:p>
@@ -1079,7 +1083,7 @@
           <a:p>
             <a:fld id="{F7021451-1387-4CA6-816F-3879F97B5CBC}" type="slidenum">
               <a:rPr lang="en-US"/>
-              <a:t>7</a:t>
+              <a:t>11</a:t>
             </a:fld>
             <a:endParaRPr lang="en-US"/>
           </a:p>
@@ -1163,7 +1167,7 @@
           <a:p>
             <a:fld id="{F7021451-1387-4CA6-816F-3879F97B5CBC}" type="slidenum">
               <a:rPr lang="en-US"/>
-              <a:t>8</a:t>
+              <a:t>12</a:t>
             </a:fld>
             <a:endParaRPr lang="en-US"/>
           </a:p>
@@ -1247,7 +1251,7 @@
           <a:p>
             <a:fld id="{F7021451-1387-4CA6-816F-3879F97B5CBC}" type="slidenum">
               <a:rPr lang="en-US"/>
-              <a:t>9</a:t>
+              <a:t>13</a:t>
             </a:fld>
             <a:endParaRPr lang="en-US"/>
           </a:p>
@@ -1947,6 +1951,2174 @@
 </p:sld>
 </file>
 
+<file path=ppt/slides/slide10.xml><?xml version="1.0" encoding="utf-8"?>
+<p:sld xmlns:a="http://schemas.openxmlformats.org/drawingml/2006/main" xmlns:r="http://schemas.openxmlformats.org/officeDocument/2006/relationships" xmlns:p="http://schemas.openxmlformats.org/presentationml/2006/main">
+  <p:cSld name="Slide 5">
+    <p:bg>
+      <p:bgPr>
+        <a:blipFill dpi="0" rotWithShape="1">
+          <a:blip r:embed="rId3">
+            <a:lum/>
+          </a:blip>
+          <a:srcRect/>
+          <a:stretch>
+            <a:fillRect/>
+          </a:stretch>
+        </a:blipFill>
+        <a:effectLst/>
+      </p:bgPr>
+    </p:bg>
+    <p:spTree>
+      <p:nvGrpSpPr>
+        <p:cNvPr id="1" name=""/>
+        <p:cNvGrpSpPr/>
+        <p:nvPr/>
+      </p:nvGrpSpPr>
+      <p:grpSpPr>
+        <a:xfrm>
+          <a:off x="0" y="0"/>
+          <a:ext cx="0" cy="0"/>
+          <a:chOff x="0" y="0"/>
+          <a:chExt cx="0" cy="0"/>
+        </a:xfrm>
+      </p:grpSpPr>
+      <p:sp>
+        <p:nvSpPr>
+          <p:cNvPr id="2" name="Text 0"/>
+          <p:cNvSpPr/>
+          <p:nvPr/>
+        </p:nvSpPr>
+        <p:spPr>
+          <a:xfrm>
+            <a:off x="457200" y="384048"/>
+            <a:ext cx="8229600" cy="548640"/>
+          </a:xfrm>
+          <a:prstGeom prst="rect">
+            <a:avLst/>
+          </a:prstGeom>
+          <a:noFill/>
+          <a:ln/>
+        </p:spPr>
+        <p:txBody>
+          <a:bodyPr wrap="square" lIns="0" tIns="0" rIns="0" bIns="0" rtlCol="0" anchor="ctr"/>
+          <a:lstStyle/>
+          <a:p>
+            <a:pPr marL="0" indent="0" algn="l">
+              <a:buNone/>
+            </a:pPr>
+            <a:r>
+              <a:rPr lang="en-US" sz="2600" b="1" dirty="0">
+                <a:solidFill>
+                  <a:srgbClr val="0A3D62"/>
+                </a:solidFill>
+                <a:latin typeface="Cambria" pitchFamily="34" charset="0"/>
+                <a:ea typeface="Cambria" pitchFamily="34" charset="-122"/>
+                <a:cs typeface="Cambria" pitchFamily="34" charset="-120"/>
+              </a:rPr>
+              <a:t>Future Enhancements &amp; Key Insights</a:t>
+            </a:r>
+            <a:endParaRPr lang="en-US" sz="2600" dirty="0"/>
+          </a:p>
+        </p:txBody>
+      </p:sp>
+      <p:sp>
+        <p:nvSpPr>
+          <p:cNvPr id="3" name="Text 1"/>
+          <p:cNvSpPr/>
+          <p:nvPr/>
+        </p:nvSpPr>
+        <p:spPr>
+          <a:xfrm>
+            <a:off x="457200" y="1005840"/>
+            <a:ext cx="3657600" cy="256032"/>
+          </a:xfrm>
+          <a:prstGeom prst="rect">
+            <a:avLst/>
+          </a:prstGeom>
+          <a:noFill/>
+          <a:ln/>
+        </p:spPr>
+        <p:txBody>
+          <a:bodyPr wrap="square" lIns="0" tIns="0" rIns="0" bIns="0" rtlCol="0" anchor="ctr"/>
+          <a:lstStyle/>
+          <a:p>
+            <a:pPr marL="0" indent="0">
+              <a:buNone/>
+            </a:pPr>
+            <a:r>
+              <a:rPr lang="en-US" sz="1150" b="1" kern="0" spc="100" dirty="0">
+                <a:solidFill>
+                  <a:srgbClr val="2AB7CA"/>
+                </a:solidFill>
+                <a:latin typeface="Calibri" pitchFamily="34" charset="0"/>
+                <a:ea typeface="Calibri" pitchFamily="34" charset="-122"/>
+                <a:cs typeface="Calibri" pitchFamily="34" charset="-120"/>
+              </a:rPr>
+              <a:t>FUTURE ENHANCEMENTS</a:t>
+            </a:r>
+            <a:endParaRPr lang="en-US" sz="1150" dirty="0"/>
+          </a:p>
+        </p:txBody>
+      </p:sp>
+      <p:sp>
+        <p:nvSpPr>
+          <p:cNvPr id="4" name="Shape 2"/>
+          <p:cNvSpPr/>
+          <p:nvPr/>
+        </p:nvSpPr>
+        <p:spPr>
+          <a:xfrm>
+            <a:off x="457200" y="1335024"/>
+            <a:ext cx="384048" cy="384048"/>
+          </a:xfrm>
+          <a:prstGeom prst="ellipse">
+            <a:avLst/>
+          </a:prstGeom>
+          <a:solidFill>
+            <a:srgbClr val="0A3D62"/>
+          </a:solidFill>
+          <a:ln/>
+        </p:spPr>
+      </p:sp>
+      <p:pic>
+        <p:nvPicPr>
+          <p:cNvPr id="5" name="Image 0" descr="./icons/bolt.png"/>
+          <p:cNvPicPr>
+            <a:picLocks noChangeAspect="1"/>
+          </p:cNvPicPr>
+          <p:nvPr/>
+        </p:nvPicPr>
+        <p:blipFill>
+          <a:blip r:embed="rId4"/>
+          <a:stretch>
+            <a:fillRect/>
+          </a:stretch>
+        </p:blipFill>
+        <p:spPr>
+          <a:xfrm>
+            <a:off x="549372" y="1427196"/>
+            <a:ext cx="199705" cy="199705"/>
+          </a:xfrm>
+          <a:prstGeom prst="rect">
+            <a:avLst/>
+          </a:prstGeom>
+        </p:spPr>
+      </p:pic>
+      <p:sp>
+        <p:nvSpPr>
+          <p:cNvPr id="6" name="Text 3"/>
+          <p:cNvSpPr/>
+          <p:nvPr/>
+        </p:nvSpPr>
+        <p:spPr>
+          <a:xfrm>
+            <a:off x="969264" y="1307592"/>
+            <a:ext cx="3200400" cy="566928"/>
+          </a:xfrm>
+          <a:prstGeom prst="rect">
+            <a:avLst/>
+          </a:prstGeom>
+          <a:noFill/>
+          <a:ln/>
+        </p:spPr>
+        <p:txBody>
+          <a:bodyPr wrap="square" lIns="0" tIns="0" rIns="0" bIns="0" rtlCol="0" anchor="ctr"/>
+          <a:lstStyle/>
+          <a:p>
+            <a:pPr marL="0" indent="0">
+              <a:lnSpc>
+                <a:spcPct val="105000"/>
+              </a:lnSpc>
+              <a:buNone/>
+            </a:pPr>
+            <a:r>
+              <a:rPr lang="en-US" sz="1000" dirty="0">
+                <a:solidFill>
+                  <a:srgbClr val="1C2B33"/>
+                </a:solidFill>
+                <a:latin typeface="Calibri" pitchFamily="34" charset="0"/>
+                <a:ea typeface="Calibri" pitchFamily="34" charset="-122"/>
+                <a:cs typeface="Calibri" pitchFamily="34" charset="-120"/>
+              </a:rPr>
+              <a:t>Real-time threat monitoring</a:t>
+            </a:r>
+            <a:endParaRPr lang="en-US" sz="1000" dirty="0"/>
+          </a:p>
+        </p:txBody>
+      </p:sp>
+      <p:sp>
+        <p:nvSpPr>
+          <p:cNvPr id="7" name="Shape 4"/>
+          <p:cNvSpPr/>
+          <p:nvPr/>
+        </p:nvSpPr>
+        <p:spPr>
+          <a:xfrm>
+            <a:off x="457200" y="1901952"/>
+            <a:ext cx="384048" cy="384048"/>
+          </a:xfrm>
+          <a:prstGeom prst="ellipse">
+            <a:avLst/>
+          </a:prstGeom>
+          <a:solidFill>
+            <a:srgbClr val="0A3D62"/>
+          </a:solidFill>
+          <a:ln/>
+        </p:spPr>
+      </p:sp>
+      <p:pic>
+        <p:nvPicPr>
+          <p:cNvPr id="8" name="Image 1" descr="./icons/bell.png"/>
+          <p:cNvPicPr>
+            <a:picLocks noChangeAspect="1"/>
+          </p:cNvPicPr>
+          <p:nvPr/>
+        </p:nvPicPr>
+        <p:blipFill>
+          <a:blip r:embed="rId5"/>
+          <a:stretch>
+            <a:fillRect/>
+          </a:stretch>
+        </p:blipFill>
+        <p:spPr>
+          <a:xfrm>
+            <a:off x="549372" y="1994124"/>
+            <a:ext cx="199705" cy="199705"/>
+          </a:xfrm>
+          <a:prstGeom prst="rect">
+            <a:avLst/>
+          </a:prstGeom>
+        </p:spPr>
+      </p:pic>
+      <p:sp>
+        <p:nvSpPr>
+          <p:cNvPr id="9" name="Text 5"/>
+          <p:cNvSpPr/>
+          <p:nvPr/>
+        </p:nvSpPr>
+        <p:spPr>
+          <a:xfrm>
+            <a:off x="969264" y="1874520"/>
+            <a:ext cx="3200400" cy="566928"/>
+          </a:xfrm>
+          <a:prstGeom prst="rect">
+            <a:avLst/>
+          </a:prstGeom>
+          <a:noFill/>
+          <a:ln/>
+        </p:spPr>
+        <p:txBody>
+          <a:bodyPr wrap="square" lIns="0" tIns="0" rIns="0" bIns="0" rtlCol="0" anchor="ctr"/>
+          <a:lstStyle/>
+          <a:p>
+            <a:pPr marL="0" indent="0">
+              <a:lnSpc>
+                <a:spcPct val="105000"/>
+              </a:lnSpc>
+              <a:buNone/>
+            </a:pPr>
+            <a:r>
+              <a:rPr lang="en-US" sz="1000" dirty="0">
+                <a:solidFill>
+                  <a:srgbClr val="1C2B33"/>
+                </a:solidFill>
+                <a:latin typeface="Calibri" pitchFamily="34" charset="0"/>
+                <a:ea typeface="Calibri" pitchFamily="34" charset="-122"/>
+                <a:cs typeface="Calibri" pitchFamily="34" charset="-120"/>
+              </a:rPr>
+              <a:t>Automated threat alerts &amp; notifications</a:t>
+            </a:r>
+            <a:endParaRPr lang="en-US" sz="1000" dirty="0"/>
+          </a:p>
+        </p:txBody>
+      </p:sp>
+      <p:sp>
+        <p:nvSpPr>
+          <p:cNvPr id="10" name="Shape 6"/>
+          <p:cNvSpPr/>
+          <p:nvPr/>
+        </p:nvSpPr>
+        <p:spPr>
+          <a:xfrm>
+            <a:off x="457200" y="2468880"/>
+            <a:ext cx="384048" cy="384048"/>
+          </a:xfrm>
+          <a:prstGeom prst="ellipse">
+            <a:avLst/>
+          </a:prstGeom>
+          <a:solidFill>
+            <a:srgbClr val="0A3D62"/>
+          </a:solidFill>
+          <a:ln/>
+        </p:spPr>
+      </p:sp>
+      <p:pic>
+        <p:nvPicPr>
+          <p:cNvPr id="11" name="Image 2" descr="./icons/database.png"/>
+          <p:cNvPicPr>
+            <a:picLocks noChangeAspect="1"/>
+          </p:cNvPicPr>
+          <p:nvPr/>
+        </p:nvPicPr>
+        <p:blipFill>
+          <a:blip r:embed="rId6"/>
+          <a:stretch>
+            <a:fillRect/>
+          </a:stretch>
+        </p:blipFill>
+        <p:spPr>
+          <a:xfrm>
+            <a:off x="549372" y="2561052"/>
+            <a:ext cx="199705" cy="199705"/>
+          </a:xfrm>
+          <a:prstGeom prst="rect">
+            <a:avLst/>
+          </a:prstGeom>
+        </p:spPr>
+      </p:pic>
+      <p:sp>
+        <p:nvSpPr>
+          <p:cNvPr id="12" name="Text 7"/>
+          <p:cNvSpPr/>
+          <p:nvPr/>
+        </p:nvSpPr>
+        <p:spPr>
+          <a:xfrm>
+            <a:off x="969264" y="2441448"/>
+            <a:ext cx="3200400" cy="566928"/>
+          </a:xfrm>
+          <a:prstGeom prst="rect">
+            <a:avLst/>
+          </a:prstGeom>
+          <a:noFill/>
+          <a:ln/>
+        </p:spPr>
+        <p:txBody>
+          <a:bodyPr wrap="square" lIns="0" tIns="0" rIns="0" bIns="0" rtlCol="0" anchor="ctr"/>
+          <a:lstStyle/>
+          <a:p>
+            <a:pPr marL="0" indent="0">
+              <a:lnSpc>
+                <a:spcPct val="105000"/>
+              </a:lnSpc>
+              <a:buNone/>
+            </a:pPr>
+            <a:r>
+              <a:rPr lang="en-US" sz="1000" dirty="0">
+                <a:solidFill>
+                  <a:srgbClr val="1C2B33"/>
+                </a:solidFill>
+                <a:latin typeface="Calibri" pitchFamily="34" charset="0"/>
+                <a:ea typeface="Calibri" pitchFamily="34" charset="-122"/>
+                <a:cs typeface="Calibri" pitchFamily="34" charset="-120"/>
+              </a:rPr>
+              <a:t>Integration with additional cybersecurity datasets</a:t>
+            </a:r>
+            <a:endParaRPr lang="en-US" sz="1000" dirty="0"/>
+          </a:p>
+        </p:txBody>
+      </p:sp>
+      <p:sp>
+        <p:nvSpPr>
+          <p:cNvPr id="13" name="Shape 8"/>
+          <p:cNvSpPr/>
+          <p:nvPr/>
+        </p:nvSpPr>
+        <p:spPr>
+          <a:xfrm>
+            <a:off x="457200" y="3035808"/>
+            <a:ext cx="384048" cy="384048"/>
+          </a:xfrm>
+          <a:prstGeom prst="ellipse">
+            <a:avLst/>
+          </a:prstGeom>
+          <a:solidFill>
+            <a:srgbClr val="0A3D62"/>
+          </a:solidFill>
+          <a:ln/>
+        </p:spPr>
+      </p:sp>
+      <p:pic>
+        <p:nvPicPr>
+          <p:cNvPr id="14" name="Image 3" descr="./icons/brain.png"/>
+          <p:cNvPicPr>
+            <a:picLocks noChangeAspect="1"/>
+          </p:cNvPicPr>
+          <p:nvPr/>
+        </p:nvPicPr>
+        <p:blipFill>
+          <a:blip r:embed="rId7"/>
+          <a:stretch>
+            <a:fillRect/>
+          </a:stretch>
+        </p:blipFill>
+        <p:spPr>
+          <a:xfrm>
+            <a:off x="549372" y="3127980"/>
+            <a:ext cx="199705" cy="199705"/>
+          </a:xfrm>
+          <a:prstGeom prst="rect">
+            <a:avLst/>
+          </a:prstGeom>
+        </p:spPr>
+      </p:pic>
+      <p:sp>
+        <p:nvSpPr>
+          <p:cNvPr id="15" name="Text 9"/>
+          <p:cNvSpPr/>
+          <p:nvPr/>
+        </p:nvSpPr>
+        <p:spPr>
+          <a:xfrm>
+            <a:off x="969264" y="3008376"/>
+            <a:ext cx="3200400" cy="566928"/>
+          </a:xfrm>
+          <a:prstGeom prst="rect">
+            <a:avLst/>
+          </a:prstGeom>
+          <a:noFill/>
+          <a:ln/>
+        </p:spPr>
+        <p:txBody>
+          <a:bodyPr wrap="square" lIns="0" tIns="0" rIns="0" bIns="0" rtlCol="0" anchor="ctr"/>
+          <a:lstStyle/>
+          <a:p>
+            <a:pPr marL="0" indent="0">
+              <a:lnSpc>
+                <a:spcPct val="105000"/>
+              </a:lnSpc>
+              <a:buNone/>
+            </a:pPr>
+            <a:r>
+              <a:rPr lang="en-US" sz="1000" dirty="0">
+                <a:solidFill>
+                  <a:srgbClr val="1C2B33"/>
+                </a:solidFill>
+                <a:latin typeface="Calibri" pitchFamily="34" charset="0"/>
+                <a:ea typeface="Calibri" pitchFamily="34" charset="-122"/>
+                <a:cs typeface="Calibri" pitchFamily="34" charset="-120"/>
+              </a:rPr>
+              <a:t>AI/ML-based threat prediction &amp; anomaly detection</a:t>
+            </a:r>
+            <a:endParaRPr lang="en-US" sz="1000" dirty="0"/>
+          </a:p>
+        </p:txBody>
+      </p:sp>
+      <p:sp>
+        <p:nvSpPr>
+          <p:cNvPr id="16" name="Text 10"/>
+          <p:cNvSpPr/>
+          <p:nvPr/>
+        </p:nvSpPr>
+        <p:spPr>
+          <a:xfrm>
+            <a:off x="457200" y="3657600"/>
+            <a:ext cx="3657600" cy="237744"/>
+          </a:xfrm>
+          <a:prstGeom prst="rect">
+            <a:avLst/>
+          </a:prstGeom>
+          <a:noFill/>
+          <a:ln/>
+        </p:spPr>
+        <p:txBody>
+          <a:bodyPr wrap="square" lIns="0" tIns="0" rIns="0" bIns="0" rtlCol="0" anchor="ctr"/>
+          <a:lstStyle/>
+          <a:p>
+            <a:pPr marL="0" indent="0">
+              <a:buNone/>
+            </a:pPr>
+            <a:r>
+              <a:rPr lang="en-US" sz="1150" b="1" kern="0" spc="100" dirty="0">
+                <a:solidFill>
+                  <a:srgbClr val="2AB7CA"/>
+                </a:solidFill>
+                <a:latin typeface="Calibri" pitchFamily="34" charset="0"/>
+                <a:ea typeface="Calibri" pitchFamily="34" charset="-122"/>
+                <a:cs typeface="Calibri" pitchFamily="34" charset="-120"/>
+              </a:rPr>
+              <a:t>KEY INSIGHTS</a:t>
+            </a:r>
+            <a:endParaRPr lang="en-US" sz="1150" dirty="0"/>
+          </a:p>
+        </p:txBody>
+      </p:sp>
+      <p:sp>
+        <p:nvSpPr>
+          <p:cNvPr id="17" name="Text 11"/>
+          <p:cNvSpPr/>
+          <p:nvPr/>
+        </p:nvSpPr>
+        <p:spPr>
+          <a:xfrm>
+            <a:off x="457200" y="3931920"/>
+            <a:ext cx="3749040" cy="1051560"/>
+          </a:xfrm>
+          <a:prstGeom prst="rect">
+            <a:avLst/>
+          </a:prstGeom>
+          <a:noFill/>
+          <a:ln/>
+        </p:spPr>
+        <p:txBody>
+          <a:bodyPr wrap="square" lIns="0" tIns="0" rIns="0" bIns="0" rtlCol="0" anchor="t"/>
+          <a:lstStyle/>
+          <a:p>
+            <a:pPr marL="0" indent="0">
+              <a:lnSpc>
+                <a:spcPct val="120000"/>
+              </a:lnSpc>
+              <a:buNone/>
+            </a:pPr>
+            <a:r>
+              <a:rPr lang="en-US" sz="970" b="1" dirty="0">
+                <a:solidFill>
+                  <a:srgbClr val="0A3D62"/>
+                </a:solidFill>
+                <a:latin typeface="Calibri" pitchFamily="34" charset="0"/>
+                <a:ea typeface="Calibri" pitchFamily="34" charset="-122"/>
+                <a:cs typeface="Calibri" pitchFamily="34" charset="-120"/>
+              </a:rPr>
+              <a:t>44.60 </a:t>
+            </a:r>
+            <a:r>
+              <a:rPr lang="en-US" sz="970" dirty="0">
+                <a:solidFill>
+                  <a:srgbClr val="1C2B33"/>
+                </a:solidFill>
+                <a:latin typeface="Calibri" pitchFamily="34" charset="0"/>
+                <a:ea typeface="Calibri" pitchFamily="34" charset="-122"/>
+                <a:cs typeface="Calibri" pitchFamily="34" charset="-120"/>
+              </a:rPr>
+              <a:t>Network Risk Index — above the 40 elevated-risk threshold
+</a:t>
+            </a:r>
+            <a:r>
+              <a:rPr lang="en-US" sz="970" b="1" dirty="0">
+                <a:solidFill>
+                  <a:srgbClr val="0A3D62"/>
+                </a:solidFill>
+                <a:latin typeface="Calibri" pitchFamily="34" charset="0"/>
+                <a:ea typeface="Calibri" pitchFamily="34" charset="-122"/>
+                <a:cs typeface="Calibri" pitchFamily="34" charset="-120"/>
+              </a:rPr>
+              <a:t>50.11% </a:t>
+            </a:r>
+            <a:r>
+              <a:rPr lang="en-US" sz="970" dirty="0">
+                <a:solidFill>
+                  <a:srgbClr val="1C2B33"/>
+                </a:solidFill>
+                <a:latin typeface="Calibri" pitchFamily="34" charset="0"/>
+                <a:ea typeface="Calibri" pitchFamily="34" charset="-122"/>
+                <a:cs typeface="Calibri" pitchFamily="34" charset="-120"/>
+              </a:rPr>
+              <a:t>detection rate; </a:t>
+            </a:r>
+            <a:r>
+              <a:rPr lang="en-US" sz="970" b="1" dirty="0">
+                <a:solidFill>
+                  <a:srgbClr val="0A3D62"/>
+                </a:solidFill>
+                <a:latin typeface="Calibri" pitchFamily="34" charset="0"/>
+                <a:ea typeface="Calibri" pitchFamily="34" charset="-122"/>
+                <a:cs typeface="Calibri" pitchFamily="34" charset="-120"/>
+              </a:rPr>
+              <a:t>49.99% </a:t>
+            </a:r>
+            <a:r>
+              <a:rPr lang="en-US" sz="970" dirty="0">
+                <a:solidFill>
+                  <a:srgbClr val="1C2B33"/>
+                </a:solidFill>
+                <a:latin typeface="Calibri" pitchFamily="34" charset="0"/>
+                <a:ea typeface="Calibri" pitchFamily="34" charset="-122"/>
+                <a:cs typeface="Calibri" pitchFamily="34" charset="-120"/>
+              </a:rPr>
+              <a:t>of traffic actively blocked
+</a:t>
+            </a:r>
+            <a:r>
+              <a:rPr lang="en-US" sz="970" b="1" dirty="0">
+                <a:solidFill>
+                  <a:srgbClr val="0A3D62"/>
+                </a:solidFill>
+                <a:latin typeface="Calibri" pitchFamily="34" charset="0"/>
+                <a:ea typeface="Calibri" pitchFamily="34" charset="-122"/>
+                <a:cs typeface="Calibri" pitchFamily="34" charset="-120"/>
+              </a:rPr>
+              <a:t>SSH </a:t>
+            </a:r>
+            <a:r>
+              <a:rPr lang="en-US" sz="970" dirty="0">
+                <a:solidFill>
+                  <a:srgbClr val="1C2B33"/>
+                </a:solidFill>
+                <a:latin typeface="Calibri" pitchFamily="34" charset="0"/>
+                <a:ea typeface="Calibri" pitchFamily="34" charset="-122"/>
+                <a:cs typeface="Calibri" pitchFamily="34" charset="-120"/>
+              </a:rPr>
+              <a:t>recorded the highest share of critical breaches</a:t>
+            </a:r>
+            <a:endParaRPr lang="en-US" sz="970" dirty="0"/>
+          </a:p>
+        </p:txBody>
+      </p:sp>
+      <p:sp>
+        <p:nvSpPr>
+          <p:cNvPr id="18" name="Shape 12"/>
+          <p:cNvSpPr/>
+          <p:nvPr/>
+        </p:nvSpPr>
+        <p:spPr>
+          <a:xfrm>
+            <a:off x="4526280" y="1005840"/>
+            <a:ext cx="4251960" cy="2743200"/>
+          </a:xfrm>
+          <a:prstGeom prst="roundRect">
+            <a:avLst>
+              <a:gd name="adj" fmla="val 2000"/>
+            </a:avLst>
+          </a:prstGeom>
+          <a:solidFill>
+            <a:srgbClr val="0F1621"/>
+          </a:solidFill>
+          <a:ln w="12700">
+            <a:solidFill>
+              <a:srgbClr val="D8E3E8"/>
+            </a:solidFill>
+            <a:prstDash val="solid"/>
+          </a:ln>
+          <a:effectLst>
+            <a:outerShdw blurRad="101600" dist="25400" dir="5400000" algn="bl" rotWithShape="0">
+              <a:srgbClr val="000000">
+                <a:alpha val="12000"/>
+              </a:srgbClr>
+            </a:outerShdw>
+          </a:effectLst>
+        </p:spPr>
+      </p:sp>
+      <p:pic>
+        <p:nvPicPr>
+          <p:cNvPr id="19" name="Image 4" descr="./assets/dash7_main.jpg"/>
+          <p:cNvPicPr>
+            <a:picLocks noChangeAspect="1"/>
+          </p:cNvPicPr>
+          <p:nvPr/>
+        </p:nvPicPr>
+        <p:blipFill>
+          <a:blip r:embed="rId8"/>
+          <a:stretch>
+            <a:fillRect/>
+          </a:stretch>
+        </p:blipFill>
+        <p:spPr>
+          <a:xfrm>
+            <a:off x="4645152" y="1115568"/>
+            <a:ext cx="4014216" cy="2231136"/>
+          </a:xfrm>
+          <a:prstGeom prst="rect">
+            <a:avLst/>
+          </a:prstGeom>
+        </p:spPr>
+      </p:pic>
+      <p:sp>
+        <p:nvSpPr>
+          <p:cNvPr id="20" name="Text 13"/>
+          <p:cNvSpPr/>
+          <p:nvPr/>
+        </p:nvSpPr>
+        <p:spPr>
+          <a:xfrm>
+            <a:off x="4645152" y="3364992"/>
+            <a:ext cx="4014216" cy="320040"/>
+          </a:xfrm>
+          <a:prstGeom prst="rect">
+            <a:avLst/>
+          </a:prstGeom>
+          <a:noFill/>
+          <a:ln/>
+        </p:spPr>
+        <p:txBody>
+          <a:bodyPr wrap="square" lIns="0" tIns="0" rIns="0" bIns="0" rtlCol="0" anchor="t"/>
+          <a:lstStyle/>
+          <a:p>
+            <a:pPr marL="0" indent="0" algn="ctr">
+              <a:buNone/>
+            </a:pPr>
+            <a:r>
+              <a:rPr lang="en-US" sz="950" i="1" dirty="0">
+                <a:solidFill>
+                  <a:srgbClr val="CADCE6"/>
+                </a:solidFill>
+                <a:latin typeface="Calibri" pitchFamily="34" charset="0"/>
+                <a:ea typeface="Calibri" pitchFamily="34" charset="-122"/>
+                <a:cs typeface="Calibri" pitchFamily="34" charset="-120"/>
+              </a:rPr>
+              <a:t>Dashboard 7 of 7  —  Overall Threat Detection Performance</a:t>
+            </a:r>
+            <a:endParaRPr lang="en-US" sz="950" dirty="0"/>
+          </a:p>
+        </p:txBody>
+      </p:sp>
+    </p:spTree>
+  </p:cSld>
+  <p:clrMapOvr>
+    <a:masterClrMapping/>
+  </p:clrMapOvr>
+</p:sld>
+</file>
+
+<file path=ppt/slides/slide11.xml><?xml version="1.0" encoding="utf-8"?>
+<p:sld xmlns:a="http://schemas.openxmlformats.org/drawingml/2006/main" xmlns:r="http://schemas.openxmlformats.org/officeDocument/2006/relationships" xmlns:p="http://schemas.openxmlformats.org/presentationml/2006/main">
+  <p:cSld name="Slide 6">
+    <p:bg>
+      <p:bgPr>
+        <a:blipFill dpi="0" rotWithShape="1">
+          <a:blip r:embed="rId3">
+            <a:lum/>
+          </a:blip>
+          <a:srcRect/>
+          <a:stretch>
+            <a:fillRect/>
+          </a:stretch>
+        </a:blipFill>
+        <a:effectLst/>
+      </p:bgPr>
+    </p:bg>
+    <p:spTree>
+      <p:nvGrpSpPr>
+        <p:cNvPr id="1" name=""/>
+        <p:cNvGrpSpPr/>
+        <p:nvPr/>
+      </p:nvGrpSpPr>
+      <p:grpSpPr>
+        <a:xfrm>
+          <a:off x="0" y="0"/>
+          <a:ext cx="0" cy="0"/>
+          <a:chOff x="0" y="0"/>
+          <a:chExt cx="0" cy="0"/>
+        </a:xfrm>
+      </p:grpSpPr>
+      <p:sp>
+        <p:nvSpPr>
+          <p:cNvPr id="2" name="Text 0"/>
+          <p:cNvSpPr/>
+          <p:nvPr/>
+        </p:nvSpPr>
+        <p:spPr>
+          <a:xfrm>
+            <a:off x="457200" y="384048"/>
+            <a:ext cx="8229600" cy="548640"/>
+          </a:xfrm>
+          <a:prstGeom prst="rect">
+            <a:avLst/>
+          </a:prstGeom>
+          <a:noFill/>
+          <a:ln/>
+        </p:spPr>
+        <p:txBody>
+          <a:bodyPr wrap="square" lIns="0" tIns="0" rIns="0" bIns="0" rtlCol="0" anchor="ctr"/>
+          <a:lstStyle/>
+          <a:p>
+            <a:pPr marL="0" indent="0" algn="l">
+              <a:buNone/>
+            </a:pPr>
+            <a:r>
+              <a:rPr lang="en-US" sz="2600" b="1" dirty="0">
+                <a:solidFill>
+                  <a:srgbClr val="0A3D62"/>
+                </a:solidFill>
+                <a:latin typeface="Cambria" pitchFamily="34" charset="0"/>
+                <a:ea typeface="Cambria" pitchFamily="34" charset="-122"/>
+                <a:cs typeface="Cambria" pitchFamily="34" charset="-120"/>
+              </a:rPr>
+              <a:t>Conclusion</a:t>
+            </a:r>
+            <a:endParaRPr lang="en-US" sz="2600" dirty="0"/>
+          </a:p>
+        </p:txBody>
+      </p:sp>
+      <p:sp>
+        <p:nvSpPr>
+          <p:cNvPr id="3" name="Shape 1"/>
+          <p:cNvSpPr/>
+          <p:nvPr/>
+        </p:nvSpPr>
+        <p:spPr>
+          <a:xfrm>
+            <a:off x="457200" y="1051560"/>
+            <a:ext cx="8229600" cy="960120"/>
+          </a:xfrm>
+          <a:prstGeom prst="roundRect">
+            <a:avLst>
+              <a:gd name="adj" fmla="val 7619"/>
+            </a:avLst>
+          </a:prstGeom>
+          <a:solidFill>
+            <a:srgbClr val="0A3D62"/>
+          </a:solidFill>
+          <a:ln/>
+        </p:spPr>
+      </p:sp>
+      <p:sp>
+        <p:nvSpPr>
+          <p:cNvPr id="4" name="Text 2"/>
+          <p:cNvSpPr/>
+          <p:nvPr/>
+        </p:nvSpPr>
+        <p:spPr>
+          <a:xfrm>
+            <a:off x="777240" y="1051560"/>
+            <a:ext cx="7589520" cy="960120"/>
+          </a:xfrm>
+          <a:prstGeom prst="rect">
+            <a:avLst/>
+          </a:prstGeom>
+          <a:noFill/>
+          <a:ln/>
+        </p:spPr>
+        <p:txBody>
+          <a:bodyPr wrap="square" lIns="0" tIns="0" rIns="0" bIns="0" rtlCol="0" anchor="ctr"/>
+          <a:lstStyle/>
+          <a:p>
+            <a:pPr marL="0" indent="0" algn="ctr">
+              <a:lnSpc>
+                <a:spcPct val="115000"/>
+              </a:lnSpc>
+              <a:buNone/>
+            </a:pPr>
+            <a:r>
+              <a:rPr lang="en-US" sz="1350" i="1" dirty="0">
+                <a:solidFill>
+                  <a:srgbClr val="FFFFFF"/>
+                </a:solidFill>
+                <a:latin typeface="Cambria" pitchFamily="34" charset="0"/>
+                <a:ea typeface="Cambria" pitchFamily="34" charset="-122"/>
+                <a:cs typeface="Cambria" pitchFamily="34" charset="-120"/>
+              </a:rPr>
+              <a:t>Cyber Threat  Analytics Platform with Incident </a:t>
+            </a:r>
+            <a:r>
+              <a:rPr lang="en-US" sz="1350" i="1" dirty="0" err="1">
+                <a:solidFill>
+                  <a:srgbClr val="FFFFFF"/>
+                </a:solidFill>
+                <a:latin typeface="Cambria" pitchFamily="34" charset="0"/>
+                <a:ea typeface="Cambria" pitchFamily="34" charset="-122"/>
+                <a:cs typeface="Cambria" pitchFamily="34" charset="-120"/>
+              </a:rPr>
+              <a:t>Visualisation</a:t>
+            </a:r>
+            <a:r>
+              <a:rPr lang="en-US" sz="1350" i="1">
+                <a:solidFill>
+                  <a:srgbClr val="FFFFFF"/>
+                </a:solidFill>
+                <a:latin typeface="Cambria" pitchFamily="34" charset="0"/>
+                <a:ea typeface="Cambria" pitchFamily="34" charset="-122"/>
+                <a:cs typeface="Cambria" pitchFamily="34" charset="-120"/>
+              </a:rPr>
+              <a:t> System successfully </a:t>
+            </a:r>
+            <a:r>
+              <a:rPr lang="en-US" sz="1350" i="1" dirty="0">
+                <a:solidFill>
+                  <a:srgbClr val="FFFFFF"/>
+                </a:solidFill>
+                <a:latin typeface="Cambria" pitchFamily="34" charset="0"/>
+                <a:ea typeface="Cambria" pitchFamily="34" charset="-122"/>
+                <a:cs typeface="Cambria" pitchFamily="34" charset="-120"/>
+              </a:rPr>
+              <a:t>transformed raw cybersecurity threat detection logs into an interactive Power BI-based threat analytics and visualization solution.</a:t>
+            </a:r>
+            <a:endParaRPr lang="en-US" sz="1350" dirty="0"/>
+          </a:p>
+        </p:txBody>
+      </p:sp>
+      <p:sp>
+        <p:nvSpPr>
+          <p:cNvPr id="5" name="Text 3"/>
+          <p:cNvSpPr/>
+          <p:nvPr/>
+        </p:nvSpPr>
+        <p:spPr>
+          <a:xfrm>
+            <a:off x="457200" y="2286000"/>
+            <a:ext cx="3840480" cy="274320"/>
+          </a:xfrm>
+          <a:prstGeom prst="rect">
+            <a:avLst/>
+          </a:prstGeom>
+          <a:noFill/>
+          <a:ln/>
+        </p:spPr>
+        <p:txBody>
+          <a:bodyPr wrap="square" lIns="0" tIns="0" rIns="0" bIns="0" rtlCol="0" anchor="ctr"/>
+          <a:lstStyle/>
+          <a:p>
+            <a:pPr marL="0" indent="0">
+              <a:buNone/>
+            </a:pPr>
+            <a:r>
+              <a:rPr lang="en-US" sz="1200" b="1" kern="0" spc="100" dirty="0">
+                <a:solidFill>
+                  <a:srgbClr val="2AB7CA"/>
+                </a:solidFill>
+                <a:latin typeface="Calibri" pitchFamily="34" charset="0"/>
+                <a:ea typeface="Calibri" pitchFamily="34" charset="-122"/>
+                <a:cs typeface="Calibri" pitchFamily="34" charset="-120"/>
+              </a:rPr>
+              <a:t>TECHNICAL SKILLS</a:t>
+            </a:r>
+            <a:endParaRPr lang="en-US" sz="1200" dirty="0"/>
+          </a:p>
+        </p:txBody>
+      </p:sp>
+      <p:sp>
+        <p:nvSpPr>
+          <p:cNvPr id="6" name="Shape 4"/>
+          <p:cNvSpPr/>
+          <p:nvPr/>
+        </p:nvSpPr>
+        <p:spPr>
+          <a:xfrm>
+            <a:off x="457200" y="2633472"/>
+            <a:ext cx="972922" cy="402336"/>
+          </a:xfrm>
+          <a:prstGeom prst="roundRect">
+            <a:avLst>
+              <a:gd name="adj" fmla="val 50000"/>
+            </a:avLst>
+          </a:prstGeom>
+          <a:solidFill>
+            <a:srgbClr val="FFFFFF"/>
+          </a:solidFill>
+          <a:ln w="12700">
+            <a:solidFill>
+              <a:srgbClr val="0A3D62"/>
+            </a:solidFill>
+            <a:prstDash val="solid"/>
+          </a:ln>
+        </p:spPr>
+      </p:sp>
+      <p:sp>
+        <p:nvSpPr>
+          <p:cNvPr id="7" name="Text 5"/>
+          <p:cNvSpPr/>
+          <p:nvPr/>
+        </p:nvSpPr>
+        <p:spPr>
+          <a:xfrm>
+            <a:off x="457200" y="2633472"/>
+            <a:ext cx="972922" cy="402336"/>
+          </a:xfrm>
+          <a:prstGeom prst="rect">
+            <a:avLst/>
+          </a:prstGeom>
+          <a:noFill/>
+          <a:ln/>
+        </p:spPr>
+        <p:txBody>
+          <a:bodyPr wrap="square" lIns="0" tIns="0" rIns="0" bIns="0" rtlCol="0" anchor="ctr"/>
+          <a:lstStyle/>
+          <a:p>
+            <a:pPr marL="0" indent="0" algn="ctr">
+              <a:buNone/>
+            </a:pPr>
+            <a:r>
+              <a:rPr lang="en-US" sz="1050" b="1" dirty="0">
+                <a:solidFill>
+                  <a:srgbClr val="0A3D62"/>
+                </a:solidFill>
+                <a:latin typeface="Calibri" pitchFamily="34" charset="0"/>
+                <a:ea typeface="Calibri" pitchFamily="34" charset="-122"/>
+                <a:cs typeface="Calibri" pitchFamily="34" charset="-120"/>
+              </a:rPr>
+              <a:t>Power BI</a:t>
+            </a:r>
+            <a:endParaRPr lang="en-US" sz="1050" dirty="0"/>
+          </a:p>
+        </p:txBody>
+      </p:sp>
+      <p:sp>
+        <p:nvSpPr>
+          <p:cNvPr id="8" name="Shape 6"/>
+          <p:cNvSpPr/>
+          <p:nvPr/>
+        </p:nvSpPr>
+        <p:spPr>
+          <a:xfrm>
+            <a:off x="1576426" y="2633472"/>
+            <a:ext cx="1241755" cy="402336"/>
+          </a:xfrm>
+          <a:prstGeom prst="roundRect">
+            <a:avLst>
+              <a:gd name="adj" fmla="val 50000"/>
+            </a:avLst>
+          </a:prstGeom>
+          <a:solidFill>
+            <a:srgbClr val="FFFFFF"/>
+          </a:solidFill>
+          <a:ln w="12700">
+            <a:solidFill>
+              <a:srgbClr val="0A3D62"/>
+            </a:solidFill>
+            <a:prstDash val="solid"/>
+          </a:ln>
+        </p:spPr>
+      </p:sp>
+      <p:sp>
+        <p:nvSpPr>
+          <p:cNvPr id="9" name="Text 7"/>
+          <p:cNvSpPr/>
+          <p:nvPr/>
+        </p:nvSpPr>
+        <p:spPr>
+          <a:xfrm>
+            <a:off x="1576426" y="2633472"/>
+            <a:ext cx="1241755" cy="402336"/>
+          </a:xfrm>
+          <a:prstGeom prst="rect">
+            <a:avLst/>
+          </a:prstGeom>
+          <a:noFill/>
+          <a:ln/>
+        </p:spPr>
+        <p:txBody>
+          <a:bodyPr wrap="square" lIns="0" tIns="0" rIns="0" bIns="0" rtlCol="0" anchor="ctr"/>
+          <a:lstStyle/>
+          <a:p>
+            <a:pPr marL="0" indent="0" algn="ctr">
+              <a:buNone/>
+            </a:pPr>
+            <a:r>
+              <a:rPr lang="en-US" sz="1050" b="1" dirty="0">
+                <a:solidFill>
+                  <a:srgbClr val="0A3D62"/>
+                </a:solidFill>
+                <a:latin typeface="Calibri" pitchFamily="34" charset="0"/>
+                <a:ea typeface="Calibri" pitchFamily="34" charset="-122"/>
+                <a:cs typeface="Calibri" pitchFamily="34" charset="-120"/>
+              </a:rPr>
+              <a:t>Power Query</a:t>
+            </a:r>
+            <a:endParaRPr lang="en-US" sz="1050" dirty="0"/>
+          </a:p>
+        </p:txBody>
+      </p:sp>
+      <p:sp>
+        <p:nvSpPr>
+          <p:cNvPr id="10" name="Shape 8"/>
+          <p:cNvSpPr/>
+          <p:nvPr/>
+        </p:nvSpPr>
+        <p:spPr>
+          <a:xfrm>
+            <a:off x="2964485" y="2633472"/>
+            <a:ext cx="1869034" cy="402336"/>
+          </a:xfrm>
+          <a:prstGeom prst="roundRect">
+            <a:avLst>
+              <a:gd name="adj" fmla="val 50000"/>
+            </a:avLst>
+          </a:prstGeom>
+          <a:solidFill>
+            <a:srgbClr val="FFFFFF"/>
+          </a:solidFill>
+          <a:ln w="12700">
+            <a:solidFill>
+              <a:srgbClr val="0A3D62"/>
+            </a:solidFill>
+            <a:prstDash val="solid"/>
+          </a:ln>
+        </p:spPr>
+      </p:sp>
+      <p:sp>
+        <p:nvSpPr>
+          <p:cNvPr id="11" name="Text 9"/>
+          <p:cNvSpPr/>
+          <p:nvPr/>
+        </p:nvSpPr>
+        <p:spPr>
+          <a:xfrm>
+            <a:off x="2964485" y="2633472"/>
+            <a:ext cx="1869034" cy="402336"/>
+          </a:xfrm>
+          <a:prstGeom prst="rect">
+            <a:avLst/>
+          </a:prstGeom>
+          <a:noFill/>
+          <a:ln/>
+        </p:spPr>
+        <p:txBody>
+          <a:bodyPr wrap="square" lIns="0" tIns="0" rIns="0" bIns="0" rtlCol="0" anchor="ctr"/>
+          <a:lstStyle/>
+          <a:p>
+            <a:pPr marL="0" indent="0" algn="ctr">
+              <a:buNone/>
+            </a:pPr>
+            <a:r>
+              <a:rPr lang="en-US" sz="1050" b="1" dirty="0">
+                <a:solidFill>
+                  <a:srgbClr val="0A3D62"/>
+                </a:solidFill>
+                <a:latin typeface="Calibri" pitchFamily="34" charset="0"/>
+                <a:ea typeface="Calibri" pitchFamily="34" charset="-122"/>
+                <a:cs typeface="Calibri" pitchFamily="34" charset="-120"/>
+              </a:rPr>
+              <a:t>Data Preprocessing</a:t>
+            </a:r>
+            <a:endParaRPr lang="en-US" sz="1050" dirty="0"/>
+          </a:p>
+        </p:txBody>
+      </p:sp>
+      <p:sp>
+        <p:nvSpPr>
+          <p:cNvPr id="12" name="Shape 10"/>
+          <p:cNvSpPr/>
+          <p:nvPr/>
+        </p:nvSpPr>
+        <p:spPr>
+          <a:xfrm>
+            <a:off x="4979822" y="2633472"/>
+            <a:ext cx="1869034" cy="402336"/>
+          </a:xfrm>
+          <a:prstGeom prst="roundRect">
+            <a:avLst>
+              <a:gd name="adj" fmla="val 50000"/>
+            </a:avLst>
+          </a:prstGeom>
+          <a:solidFill>
+            <a:srgbClr val="FFFFFF"/>
+          </a:solidFill>
+          <a:ln w="12700">
+            <a:solidFill>
+              <a:srgbClr val="0A3D62"/>
+            </a:solidFill>
+            <a:prstDash val="solid"/>
+          </a:ln>
+        </p:spPr>
+      </p:sp>
+      <p:sp>
+        <p:nvSpPr>
+          <p:cNvPr id="13" name="Text 11"/>
+          <p:cNvSpPr/>
+          <p:nvPr/>
+        </p:nvSpPr>
+        <p:spPr>
+          <a:xfrm>
+            <a:off x="4979822" y="2633472"/>
+            <a:ext cx="1869034" cy="402336"/>
+          </a:xfrm>
+          <a:prstGeom prst="rect">
+            <a:avLst/>
+          </a:prstGeom>
+          <a:noFill/>
+          <a:ln/>
+        </p:spPr>
+        <p:txBody>
+          <a:bodyPr wrap="square" lIns="0" tIns="0" rIns="0" bIns="0" rtlCol="0" anchor="ctr"/>
+          <a:lstStyle/>
+          <a:p>
+            <a:pPr marL="0" indent="0" algn="ctr">
+              <a:buNone/>
+            </a:pPr>
+            <a:r>
+              <a:rPr lang="en-US" sz="1050" b="1" dirty="0">
+                <a:solidFill>
+                  <a:srgbClr val="0A3D62"/>
+                </a:solidFill>
+                <a:latin typeface="Calibri" pitchFamily="34" charset="0"/>
+                <a:ea typeface="Calibri" pitchFamily="34" charset="-122"/>
+                <a:cs typeface="Calibri" pitchFamily="34" charset="-120"/>
+              </a:rPr>
+              <a:t>Data Visualization</a:t>
+            </a:r>
+            <a:endParaRPr lang="en-US" sz="1050" dirty="0"/>
+          </a:p>
+        </p:txBody>
+      </p:sp>
+      <p:sp>
+        <p:nvSpPr>
+          <p:cNvPr id="14" name="Shape 12"/>
+          <p:cNvSpPr/>
+          <p:nvPr/>
+        </p:nvSpPr>
+        <p:spPr>
+          <a:xfrm>
+            <a:off x="6995160" y="2633472"/>
+            <a:ext cx="1420978" cy="402336"/>
+          </a:xfrm>
+          <a:prstGeom prst="roundRect">
+            <a:avLst>
+              <a:gd name="adj" fmla="val 50000"/>
+            </a:avLst>
+          </a:prstGeom>
+          <a:solidFill>
+            <a:srgbClr val="FFFFFF"/>
+          </a:solidFill>
+          <a:ln w="12700">
+            <a:solidFill>
+              <a:srgbClr val="0A3D62"/>
+            </a:solidFill>
+            <a:prstDash val="solid"/>
+          </a:ln>
+        </p:spPr>
+      </p:sp>
+      <p:sp>
+        <p:nvSpPr>
+          <p:cNvPr id="15" name="Text 13"/>
+          <p:cNvSpPr/>
+          <p:nvPr/>
+        </p:nvSpPr>
+        <p:spPr>
+          <a:xfrm>
+            <a:off x="6995160" y="2633472"/>
+            <a:ext cx="1420978" cy="402336"/>
+          </a:xfrm>
+          <a:prstGeom prst="rect">
+            <a:avLst/>
+          </a:prstGeom>
+          <a:noFill/>
+          <a:ln/>
+        </p:spPr>
+        <p:txBody>
+          <a:bodyPr wrap="square" lIns="0" tIns="0" rIns="0" bIns="0" rtlCol="0" anchor="ctr"/>
+          <a:lstStyle/>
+          <a:p>
+            <a:pPr marL="0" indent="0" algn="ctr">
+              <a:buNone/>
+            </a:pPr>
+            <a:r>
+              <a:rPr lang="en-US" sz="1050" b="1" dirty="0">
+                <a:solidFill>
+                  <a:srgbClr val="0A3D62"/>
+                </a:solidFill>
+                <a:latin typeface="Calibri" pitchFamily="34" charset="0"/>
+                <a:ea typeface="Calibri" pitchFamily="34" charset="-122"/>
+                <a:cs typeface="Calibri" pitchFamily="34" charset="-120"/>
+              </a:rPr>
+              <a:t>Data Analysis</a:t>
+            </a:r>
+            <a:endParaRPr lang="en-US" sz="1050" dirty="0"/>
+          </a:p>
+        </p:txBody>
+      </p:sp>
+      <p:sp>
+        <p:nvSpPr>
+          <p:cNvPr id="16" name="Text 14"/>
+          <p:cNvSpPr/>
+          <p:nvPr/>
+        </p:nvSpPr>
+        <p:spPr>
+          <a:xfrm>
+            <a:off x="457200" y="3429000"/>
+            <a:ext cx="3840480" cy="274320"/>
+          </a:xfrm>
+          <a:prstGeom prst="rect">
+            <a:avLst/>
+          </a:prstGeom>
+          <a:noFill/>
+          <a:ln/>
+        </p:spPr>
+        <p:txBody>
+          <a:bodyPr wrap="square" lIns="0" tIns="0" rIns="0" bIns="0" rtlCol="0" anchor="ctr"/>
+          <a:lstStyle/>
+          <a:p>
+            <a:pPr marL="0" indent="0">
+              <a:buNone/>
+            </a:pPr>
+            <a:r>
+              <a:rPr lang="en-US" sz="1200" b="1" kern="0" spc="100" dirty="0">
+                <a:solidFill>
+                  <a:srgbClr val="2AB7CA"/>
+                </a:solidFill>
+                <a:latin typeface="Calibri" pitchFamily="34" charset="0"/>
+                <a:ea typeface="Calibri" pitchFamily="34" charset="-122"/>
+                <a:cs typeface="Calibri" pitchFamily="34" charset="-120"/>
+              </a:rPr>
+              <a:t>SOFT SKILLS</a:t>
+            </a:r>
+            <a:endParaRPr lang="en-US" sz="1200" dirty="0"/>
+          </a:p>
+        </p:txBody>
+      </p:sp>
+      <p:sp>
+        <p:nvSpPr>
+          <p:cNvPr id="17" name="Shape 15"/>
+          <p:cNvSpPr/>
+          <p:nvPr/>
+        </p:nvSpPr>
+        <p:spPr>
+          <a:xfrm>
+            <a:off x="457200" y="3776472"/>
+            <a:ext cx="1600200" cy="402336"/>
+          </a:xfrm>
+          <a:prstGeom prst="roundRect">
+            <a:avLst>
+              <a:gd name="adj" fmla="val 50000"/>
+            </a:avLst>
+          </a:prstGeom>
+          <a:solidFill>
+            <a:srgbClr val="2AB7CA"/>
+          </a:solidFill>
+          <a:ln/>
+        </p:spPr>
+      </p:sp>
+      <p:sp>
+        <p:nvSpPr>
+          <p:cNvPr id="18" name="Text 16"/>
+          <p:cNvSpPr/>
+          <p:nvPr/>
+        </p:nvSpPr>
+        <p:spPr>
+          <a:xfrm>
+            <a:off x="457200" y="3776472"/>
+            <a:ext cx="1600200" cy="402336"/>
+          </a:xfrm>
+          <a:prstGeom prst="rect">
+            <a:avLst/>
+          </a:prstGeom>
+          <a:noFill/>
+          <a:ln/>
+        </p:spPr>
+        <p:txBody>
+          <a:bodyPr wrap="square" lIns="0" tIns="0" rIns="0" bIns="0" rtlCol="0" anchor="ctr"/>
+          <a:lstStyle/>
+          <a:p>
+            <a:pPr marL="0" indent="0" algn="ctr">
+              <a:buNone/>
+            </a:pPr>
+            <a:r>
+              <a:rPr lang="en-US" sz="1050" b="1" dirty="0">
+                <a:solidFill>
+                  <a:srgbClr val="FFFFFF"/>
+                </a:solidFill>
+                <a:latin typeface="Calibri" pitchFamily="34" charset="0"/>
+                <a:ea typeface="Calibri" pitchFamily="34" charset="-122"/>
+                <a:cs typeface="Calibri" pitchFamily="34" charset="-120"/>
+              </a:rPr>
+              <a:t>Problem Solving</a:t>
+            </a:r>
+            <a:endParaRPr lang="en-US" sz="1050" dirty="0"/>
+          </a:p>
+        </p:txBody>
+      </p:sp>
+      <p:sp>
+        <p:nvSpPr>
+          <p:cNvPr id="19" name="Shape 17"/>
+          <p:cNvSpPr/>
+          <p:nvPr/>
+        </p:nvSpPr>
+        <p:spPr>
+          <a:xfrm>
+            <a:off x="2203704" y="3776472"/>
+            <a:ext cx="1420978" cy="402336"/>
+          </a:xfrm>
+          <a:prstGeom prst="roundRect">
+            <a:avLst>
+              <a:gd name="adj" fmla="val 50000"/>
+            </a:avLst>
+          </a:prstGeom>
+          <a:solidFill>
+            <a:srgbClr val="2AB7CA"/>
+          </a:solidFill>
+          <a:ln/>
+        </p:spPr>
+      </p:sp>
+      <p:sp>
+        <p:nvSpPr>
+          <p:cNvPr id="20" name="Text 18"/>
+          <p:cNvSpPr/>
+          <p:nvPr/>
+        </p:nvSpPr>
+        <p:spPr>
+          <a:xfrm>
+            <a:off x="2203704" y="3776472"/>
+            <a:ext cx="1420978" cy="402336"/>
+          </a:xfrm>
+          <a:prstGeom prst="rect">
+            <a:avLst/>
+          </a:prstGeom>
+          <a:noFill/>
+          <a:ln/>
+        </p:spPr>
+        <p:txBody>
+          <a:bodyPr wrap="square" lIns="0" tIns="0" rIns="0" bIns="0" rtlCol="0" anchor="ctr"/>
+          <a:lstStyle/>
+          <a:p>
+            <a:pPr marL="0" indent="0" algn="ctr">
+              <a:buNone/>
+            </a:pPr>
+            <a:r>
+              <a:rPr lang="en-US" sz="1050" b="1" dirty="0">
+                <a:solidFill>
+                  <a:srgbClr val="FFFFFF"/>
+                </a:solidFill>
+                <a:latin typeface="Calibri" pitchFamily="34" charset="0"/>
+                <a:ea typeface="Calibri" pitchFamily="34" charset="-122"/>
+                <a:cs typeface="Calibri" pitchFamily="34" charset="-120"/>
+              </a:rPr>
+              <a:t>Communication</a:t>
+            </a:r>
+            <a:endParaRPr lang="en-US" sz="1050" dirty="0"/>
+          </a:p>
+        </p:txBody>
+      </p:sp>
+      <p:sp>
+        <p:nvSpPr>
+          <p:cNvPr id="21" name="Shape 19"/>
+          <p:cNvSpPr/>
+          <p:nvPr/>
+        </p:nvSpPr>
+        <p:spPr>
+          <a:xfrm>
+            <a:off x="3770986" y="3776472"/>
+            <a:ext cx="972922" cy="402336"/>
+          </a:xfrm>
+          <a:prstGeom prst="roundRect">
+            <a:avLst>
+              <a:gd name="adj" fmla="val 50000"/>
+            </a:avLst>
+          </a:prstGeom>
+          <a:solidFill>
+            <a:srgbClr val="2AB7CA"/>
+          </a:solidFill>
+          <a:ln/>
+        </p:spPr>
+      </p:sp>
+      <p:sp>
+        <p:nvSpPr>
+          <p:cNvPr id="22" name="Text 20"/>
+          <p:cNvSpPr/>
+          <p:nvPr/>
+        </p:nvSpPr>
+        <p:spPr>
+          <a:xfrm>
+            <a:off x="3770986" y="3776472"/>
+            <a:ext cx="972922" cy="402336"/>
+          </a:xfrm>
+          <a:prstGeom prst="rect">
+            <a:avLst/>
+          </a:prstGeom>
+          <a:noFill/>
+          <a:ln/>
+        </p:spPr>
+        <p:txBody>
+          <a:bodyPr wrap="square" lIns="0" tIns="0" rIns="0" bIns="0" rtlCol="0" anchor="ctr"/>
+          <a:lstStyle/>
+          <a:p>
+            <a:pPr marL="0" indent="0" algn="ctr">
+              <a:buNone/>
+            </a:pPr>
+            <a:r>
+              <a:rPr lang="en-US" sz="1050" b="1" dirty="0">
+                <a:solidFill>
+                  <a:srgbClr val="FFFFFF"/>
+                </a:solidFill>
+                <a:latin typeface="Calibri" pitchFamily="34" charset="0"/>
+                <a:ea typeface="Calibri" pitchFamily="34" charset="-122"/>
+                <a:cs typeface="Calibri" pitchFamily="34" charset="-120"/>
+              </a:rPr>
+              <a:t>Teamwork</a:t>
+            </a:r>
+            <a:endParaRPr lang="en-US" sz="1050" dirty="0"/>
+          </a:p>
+        </p:txBody>
+      </p:sp>
+      <p:sp>
+        <p:nvSpPr>
+          <p:cNvPr id="23" name="Shape 21"/>
+          <p:cNvSpPr/>
+          <p:nvPr/>
+        </p:nvSpPr>
+        <p:spPr>
+          <a:xfrm>
+            <a:off x="4890211" y="3776472"/>
+            <a:ext cx="1331366" cy="402336"/>
+          </a:xfrm>
+          <a:prstGeom prst="roundRect">
+            <a:avLst>
+              <a:gd name="adj" fmla="val 50000"/>
+            </a:avLst>
+          </a:prstGeom>
+          <a:solidFill>
+            <a:srgbClr val="2AB7CA"/>
+          </a:solidFill>
+          <a:ln/>
+        </p:spPr>
+      </p:sp>
+      <p:sp>
+        <p:nvSpPr>
+          <p:cNvPr id="24" name="Text 22"/>
+          <p:cNvSpPr/>
+          <p:nvPr/>
+        </p:nvSpPr>
+        <p:spPr>
+          <a:xfrm>
+            <a:off x="4890211" y="3776472"/>
+            <a:ext cx="1331366" cy="402336"/>
+          </a:xfrm>
+          <a:prstGeom prst="rect">
+            <a:avLst/>
+          </a:prstGeom>
+          <a:noFill/>
+          <a:ln/>
+        </p:spPr>
+        <p:txBody>
+          <a:bodyPr wrap="square" lIns="0" tIns="0" rIns="0" bIns="0" rtlCol="0" anchor="ctr"/>
+          <a:lstStyle/>
+          <a:p>
+            <a:pPr marL="0" indent="0" algn="ctr">
+              <a:buNone/>
+            </a:pPr>
+            <a:r>
+              <a:rPr lang="en-US" sz="1050" b="1" dirty="0">
+                <a:solidFill>
+                  <a:srgbClr val="FFFFFF"/>
+                </a:solidFill>
+                <a:latin typeface="Calibri" pitchFamily="34" charset="0"/>
+                <a:ea typeface="Calibri" pitchFamily="34" charset="-122"/>
+                <a:cs typeface="Calibri" pitchFamily="34" charset="-120"/>
+              </a:rPr>
+              <a:t>Presentation</a:t>
+            </a:r>
+            <a:endParaRPr lang="en-US" sz="1050" dirty="0"/>
+          </a:p>
+        </p:txBody>
+      </p:sp>
+    </p:spTree>
+  </p:cSld>
+  <p:clrMapOvr>
+    <a:masterClrMapping/>
+  </p:clrMapOvr>
+</p:sld>
+</file>
+
+<file path=ppt/slides/slide12.xml><?xml version="1.0" encoding="utf-8"?>
+<p:sld xmlns:a="http://schemas.openxmlformats.org/drawingml/2006/main" xmlns:r="http://schemas.openxmlformats.org/officeDocument/2006/relationships" xmlns:p="http://schemas.openxmlformats.org/presentationml/2006/main">
+  <p:cSld name="Slide 7">
+    <p:bg>
+      <p:bgPr>
+        <a:blipFill dpi="0" rotWithShape="1">
+          <a:blip r:embed="rId3">
+            <a:lum/>
+          </a:blip>
+          <a:srcRect/>
+          <a:stretch>
+            <a:fillRect/>
+          </a:stretch>
+        </a:blipFill>
+        <a:effectLst/>
+      </p:bgPr>
+    </p:bg>
+    <p:spTree>
+      <p:nvGrpSpPr>
+        <p:cNvPr id="1" name=""/>
+        <p:cNvGrpSpPr/>
+        <p:nvPr/>
+      </p:nvGrpSpPr>
+      <p:grpSpPr>
+        <a:xfrm>
+          <a:off x="0" y="0"/>
+          <a:ext cx="0" cy="0"/>
+          <a:chOff x="0" y="0"/>
+          <a:chExt cx="0" cy="0"/>
+        </a:xfrm>
+      </p:grpSpPr>
+      <p:sp>
+        <p:nvSpPr>
+          <p:cNvPr id="2" name="Text 0"/>
+          <p:cNvSpPr/>
+          <p:nvPr/>
+        </p:nvSpPr>
+        <p:spPr>
+          <a:xfrm>
+            <a:off x="457200" y="384048"/>
+            <a:ext cx="8229600" cy="548640"/>
+          </a:xfrm>
+          <a:prstGeom prst="rect">
+            <a:avLst/>
+          </a:prstGeom>
+          <a:noFill/>
+          <a:ln/>
+        </p:spPr>
+        <p:txBody>
+          <a:bodyPr wrap="square" lIns="0" tIns="0" rIns="0" bIns="0" rtlCol="0" anchor="ctr"/>
+          <a:lstStyle/>
+          <a:p>
+            <a:pPr marL="0" indent="0" algn="l">
+              <a:buNone/>
+            </a:pPr>
+            <a:r>
+              <a:rPr lang="en-US" sz="2600" b="1" dirty="0">
+                <a:solidFill>
+                  <a:srgbClr val="0A3D62"/>
+                </a:solidFill>
+                <a:latin typeface="Cambria" pitchFamily="34" charset="0"/>
+                <a:ea typeface="Cambria" pitchFamily="34" charset="-122"/>
+                <a:cs typeface="Cambria" pitchFamily="34" charset="-120"/>
+              </a:rPr>
+              <a:t>Acknowledgements &amp; References</a:t>
+            </a:r>
+            <a:endParaRPr lang="en-US" sz="2600" dirty="0"/>
+          </a:p>
+        </p:txBody>
+      </p:sp>
+      <p:sp>
+        <p:nvSpPr>
+          <p:cNvPr id="3" name="Shape 1"/>
+          <p:cNvSpPr/>
+          <p:nvPr/>
+        </p:nvSpPr>
+        <p:spPr>
+          <a:xfrm>
+            <a:off x="457200" y="1143000"/>
+            <a:ext cx="457200" cy="457200"/>
+          </a:xfrm>
+          <a:prstGeom prst="ellipse">
+            <a:avLst/>
+          </a:prstGeom>
+          <a:solidFill>
+            <a:srgbClr val="0A3D62"/>
+          </a:solidFill>
+          <a:ln/>
+        </p:spPr>
+      </p:sp>
+      <p:pic>
+        <p:nvPicPr>
+          <p:cNvPr id="4" name="Image 0" descr="./icons/handshake.png"/>
+          <p:cNvPicPr>
+            <a:picLocks noChangeAspect="1"/>
+          </p:cNvPicPr>
+          <p:nvPr/>
+        </p:nvPicPr>
+        <p:blipFill>
+          <a:blip r:embed="rId4"/>
+          <a:stretch>
+            <a:fillRect/>
+          </a:stretch>
+        </p:blipFill>
+        <p:spPr>
+          <a:xfrm>
+            <a:off x="566928" y="1252728"/>
+            <a:ext cx="237744" cy="237744"/>
+          </a:xfrm>
+          <a:prstGeom prst="rect">
+            <a:avLst/>
+          </a:prstGeom>
+        </p:spPr>
+      </p:pic>
+      <p:sp>
+        <p:nvSpPr>
+          <p:cNvPr id="5" name="Text 2"/>
+          <p:cNvSpPr/>
+          <p:nvPr/>
+        </p:nvSpPr>
+        <p:spPr>
+          <a:xfrm>
+            <a:off x="1051560" y="1207008"/>
+            <a:ext cx="3291840" cy="320040"/>
+          </a:xfrm>
+          <a:prstGeom prst="rect">
+            <a:avLst/>
+          </a:prstGeom>
+          <a:noFill/>
+          <a:ln/>
+        </p:spPr>
+        <p:txBody>
+          <a:bodyPr wrap="square" lIns="0" tIns="0" rIns="0" bIns="0" rtlCol="0" anchor="ctr"/>
+          <a:lstStyle/>
+          <a:p>
+            <a:pPr marL="0" indent="0">
+              <a:buNone/>
+            </a:pPr>
+            <a:r>
+              <a:rPr lang="en-US" sz="1250" b="1" kern="0" spc="50" dirty="0">
+                <a:solidFill>
+                  <a:srgbClr val="0A3D62"/>
+                </a:solidFill>
+                <a:latin typeface="Calibri" pitchFamily="34" charset="0"/>
+                <a:ea typeface="Calibri" pitchFamily="34" charset="-122"/>
+                <a:cs typeface="Calibri" pitchFamily="34" charset="-120"/>
+              </a:rPr>
+              <a:t>ACKNOWLEDGEMENTS</a:t>
+            </a:r>
+            <a:endParaRPr lang="en-US" sz="1250" dirty="0"/>
+          </a:p>
+        </p:txBody>
+      </p:sp>
+      <p:sp>
+        <p:nvSpPr>
+          <p:cNvPr id="6" name="Text 3"/>
+          <p:cNvSpPr/>
+          <p:nvPr/>
+        </p:nvSpPr>
+        <p:spPr>
+          <a:xfrm>
+            <a:off x="502920" y="1828800"/>
+            <a:ext cx="3794760" cy="2377440"/>
+          </a:xfrm>
+          <a:prstGeom prst="rect">
+            <a:avLst/>
+          </a:prstGeom>
+          <a:noFill/>
+          <a:ln/>
+        </p:spPr>
+        <p:txBody>
+          <a:bodyPr wrap="square" lIns="0" tIns="0" rIns="0" bIns="0" rtlCol="0" anchor="t"/>
+          <a:lstStyle/>
+          <a:p>
+            <a:pPr marL="177800" indent="-177800">
+              <a:lnSpc>
+                <a:spcPct val="130000"/>
+              </a:lnSpc>
+              <a:spcAft>
+                <a:spcPts val="1000"/>
+              </a:spcAft>
+              <a:buSzPct val="100000"/>
+              <a:buChar char="•"/>
+            </a:pPr>
+            <a:r>
+              <a:rPr lang="en-US" sz="1150" dirty="0">
+                <a:solidFill>
+                  <a:srgbClr val="1C2B33"/>
+                </a:solidFill>
+                <a:latin typeface="Calibri" pitchFamily="34" charset="0"/>
+                <a:ea typeface="Calibri" pitchFamily="34" charset="-122"/>
+                <a:cs typeface="Calibri" pitchFamily="34" charset="-120"/>
+              </a:rPr>
+              <a:t>Infosys SpringBoard Virtual Internship 7.0</a:t>
+            </a:r>
+            <a:endParaRPr lang="en-US" sz="1150" dirty="0"/>
+          </a:p>
+          <a:p>
+            <a:pPr marL="177800" indent="-177800">
+              <a:lnSpc>
+                <a:spcPct val="130000"/>
+              </a:lnSpc>
+              <a:spcAft>
+                <a:spcPts val="1000"/>
+              </a:spcAft>
+              <a:buSzPct val="100000"/>
+              <a:buChar char="•"/>
+            </a:pPr>
+            <a:r>
+              <a:rPr lang="en-US" sz="1150" dirty="0">
+                <a:solidFill>
+                  <a:srgbClr val="1C2B33"/>
+                </a:solidFill>
+                <a:latin typeface="Calibri" pitchFamily="34" charset="0"/>
+                <a:ea typeface="Calibri" pitchFamily="34" charset="-122"/>
+                <a:cs typeface="Calibri" pitchFamily="34" charset="-120"/>
+              </a:rPr>
+              <a:t>Mentor — Mrs. Nithayasri S J</a:t>
+            </a:r>
+            <a:endParaRPr lang="en-US" sz="1150" dirty="0"/>
+          </a:p>
+          <a:p>
+            <a:pPr marL="177800" indent="-177800">
+              <a:lnSpc>
+                <a:spcPct val="130000"/>
+              </a:lnSpc>
+              <a:spcAft>
+                <a:spcPts val="1000"/>
+              </a:spcAft>
+              <a:buSzPct val="100000"/>
+              <a:buChar char="•"/>
+            </a:pPr>
+            <a:r>
+              <a:rPr lang="en-US" sz="1150" dirty="0">
+                <a:solidFill>
+                  <a:srgbClr val="1C2B33"/>
+                </a:solidFill>
+                <a:latin typeface="Calibri" pitchFamily="34" charset="0"/>
+                <a:ea typeface="Calibri" pitchFamily="34" charset="-122"/>
+                <a:cs typeface="Calibri" pitchFamily="34" charset="-120"/>
+              </a:rPr>
+              <a:t>Team Members — Akshay Jaiswal, Srinidhi, Darsh Dwivedi, Deepan S, Harini T, Hemanth M</a:t>
+            </a:r>
+            <a:endParaRPr lang="en-US" sz="1150" dirty="0"/>
+          </a:p>
+        </p:txBody>
+      </p:sp>
+      <p:sp>
+        <p:nvSpPr>
+          <p:cNvPr id="7" name="Shape 4"/>
+          <p:cNvSpPr/>
+          <p:nvPr/>
+        </p:nvSpPr>
+        <p:spPr>
+          <a:xfrm>
+            <a:off x="4617720" y="1143000"/>
+            <a:ext cx="0" cy="3566160"/>
+          </a:xfrm>
+          <a:prstGeom prst="line">
+            <a:avLst/>
+          </a:prstGeom>
+          <a:noFill/>
+          <a:ln w="12700">
+            <a:solidFill>
+              <a:srgbClr val="D8E3E8"/>
+            </a:solidFill>
+            <a:prstDash val="solid"/>
+          </a:ln>
+        </p:spPr>
+      </p:sp>
+      <p:sp>
+        <p:nvSpPr>
+          <p:cNvPr id="8" name="Shape 5"/>
+          <p:cNvSpPr/>
+          <p:nvPr/>
+        </p:nvSpPr>
+        <p:spPr>
+          <a:xfrm>
+            <a:off x="4892040" y="1143000"/>
+            <a:ext cx="457200" cy="457200"/>
+          </a:xfrm>
+          <a:prstGeom prst="ellipse">
+            <a:avLst/>
+          </a:prstGeom>
+          <a:solidFill>
+            <a:srgbClr val="2AB7CA"/>
+          </a:solidFill>
+          <a:ln/>
+        </p:spPr>
+      </p:sp>
+      <p:pic>
+        <p:nvPicPr>
+          <p:cNvPr id="9" name="Image 1" descr="./icons/book.png"/>
+          <p:cNvPicPr>
+            <a:picLocks noChangeAspect="1"/>
+          </p:cNvPicPr>
+          <p:nvPr/>
+        </p:nvPicPr>
+        <p:blipFill>
+          <a:blip r:embed="rId5"/>
+          <a:stretch>
+            <a:fillRect/>
+          </a:stretch>
+        </p:blipFill>
+        <p:spPr>
+          <a:xfrm>
+            <a:off x="5001768" y="1252728"/>
+            <a:ext cx="237744" cy="237744"/>
+          </a:xfrm>
+          <a:prstGeom prst="rect">
+            <a:avLst/>
+          </a:prstGeom>
+        </p:spPr>
+      </p:pic>
+      <p:sp>
+        <p:nvSpPr>
+          <p:cNvPr id="10" name="Text 6"/>
+          <p:cNvSpPr/>
+          <p:nvPr/>
+        </p:nvSpPr>
+        <p:spPr>
+          <a:xfrm>
+            <a:off x="5486400" y="1207008"/>
+            <a:ext cx="3291840" cy="320040"/>
+          </a:xfrm>
+          <a:prstGeom prst="rect">
+            <a:avLst/>
+          </a:prstGeom>
+          <a:noFill/>
+          <a:ln/>
+        </p:spPr>
+        <p:txBody>
+          <a:bodyPr wrap="square" lIns="0" tIns="0" rIns="0" bIns="0" rtlCol="0" anchor="ctr"/>
+          <a:lstStyle/>
+          <a:p>
+            <a:pPr marL="0" indent="0">
+              <a:buNone/>
+            </a:pPr>
+            <a:r>
+              <a:rPr lang="en-US" sz="1250" b="1" kern="0" spc="50" dirty="0">
+                <a:solidFill>
+                  <a:srgbClr val="0A3D62"/>
+                </a:solidFill>
+                <a:latin typeface="Calibri" pitchFamily="34" charset="0"/>
+                <a:ea typeface="Calibri" pitchFamily="34" charset="-122"/>
+                <a:cs typeface="Calibri" pitchFamily="34" charset="-120"/>
+              </a:rPr>
+              <a:t>REFERENCES</a:t>
+            </a:r>
+            <a:endParaRPr lang="en-US" sz="1250" dirty="0"/>
+          </a:p>
+        </p:txBody>
+      </p:sp>
+      <p:sp>
+        <p:nvSpPr>
+          <p:cNvPr id="11" name="Text 7"/>
+          <p:cNvSpPr/>
+          <p:nvPr/>
+        </p:nvSpPr>
+        <p:spPr>
+          <a:xfrm>
+            <a:off x="4937760" y="1828800"/>
+            <a:ext cx="3794760" cy="2377440"/>
+          </a:xfrm>
+          <a:prstGeom prst="rect">
+            <a:avLst/>
+          </a:prstGeom>
+          <a:noFill/>
+          <a:ln/>
+        </p:spPr>
+        <p:txBody>
+          <a:bodyPr wrap="square" lIns="0" tIns="0" rIns="0" bIns="0" rtlCol="0" anchor="t"/>
+          <a:lstStyle/>
+          <a:p>
+            <a:pPr marL="177800" indent="-177800">
+              <a:lnSpc>
+                <a:spcPct val="130000"/>
+              </a:lnSpc>
+              <a:spcAft>
+                <a:spcPts val="1000"/>
+              </a:spcAft>
+              <a:buSzPct val="100000"/>
+              <a:buChar char="•"/>
+            </a:pPr>
+            <a:r>
+              <a:rPr lang="en-US" sz="1150" dirty="0">
+                <a:solidFill>
+                  <a:srgbClr val="1C2B33"/>
+                </a:solidFill>
+                <a:latin typeface="Calibri" pitchFamily="34" charset="0"/>
+                <a:ea typeface="Calibri" pitchFamily="34" charset="-122"/>
+                <a:cs typeface="Calibri" pitchFamily="34" charset="-120"/>
+              </a:rPr>
+              <a:t>Kaggle — Cybersecurity Threat Detection Dataset</a:t>
+            </a:r>
+            <a:endParaRPr lang="en-US" sz="1150" dirty="0"/>
+          </a:p>
+          <a:p>
+            <a:pPr marL="177800" indent="-177800">
+              <a:lnSpc>
+                <a:spcPct val="130000"/>
+              </a:lnSpc>
+              <a:spcAft>
+                <a:spcPts val="1000"/>
+              </a:spcAft>
+              <a:buSzPct val="100000"/>
+              <a:buChar char="•"/>
+            </a:pPr>
+            <a:r>
+              <a:rPr lang="en-US" sz="1150" dirty="0">
+                <a:solidFill>
+                  <a:srgbClr val="1C2B33"/>
+                </a:solidFill>
+                <a:latin typeface="Calibri" pitchFamily="34" charset="0"/>
+                <a:ea typeface="Calibri" pitchFamily="34" charset="-122"/>
+                <a:cs typeface="Calibri" pitchFamily="34" charset="-120"/>
+              </a:rPr>
+              <a:t>Power BI Official Documentation</a:t>
+            </a:r>
+            <a:endParaRPr lang="en-US" sz="1150" dirty="0"/>
+          </a:p>
+          <a:p>
+            <a:pPr marL="177800" indent="-177800">
+              <a:lnSpc>
+                <a:spcPct val="130000"/>
+              </a:lnSpc>
+              <a:spcAft>
+                <a:spcPts val="1000"/>
+              </a:spcAft>
+              <a:buSzPct val="100000"/>
+              <a:buChar char="•"/>
+            </a:pPr>
+            <a:r>
+              <a:rPr lang="en-US" sz="1150" dirty="0">
+                <a:solidFill>
+                  <a:srgbClr val="1C2B33"/>
+                </a:solidFill>
+                <a:latin typeface="Calibri" pitchFamily="34" charset="0"/>
+                <a:ea typeface="Calibri" pitchFamily="34" charset="-122"/>
+                <a:cs typeface="Calibri" pitchFamily="34" charset="-120"/>
+              </a:rPr>
+              <a:t>Power Query Documentation</a:t>
+            </a:r>
+            <a:endParaRPr lang="en-US" sz="1150" dirty="0"/>
+          </a:p>
+          <a:p>
+            <a:pPr marL="177800" indent="-177800">
+              <a:lnSpc>
+                <a:spcPct val="130000"/>
+              </a:lnSpc>
+              <a:spcAft>
+                <a:spcPts val="1000"/>
+              </a:spcAft>
+              <a:buSzPct val="100000"/>
+              <a:buChar char="•"/>
+            </a:pPr>
+            <a:r>
+              <a:rPr lang="en-US" sz="1150" dirty="0">
+                <a:solidFill>
+                  <a:srgbClr val="1C2B33"/>
+                </a:solidFill>
+                <a:latin typeface="Calibri" pitchFamily="34" charset="0"/>
+                <a:ea typeface="Calibri" pitchFamily="34" charset="-122"/>
+                <a:cs typeface="Calibri" pitchFamily="34" charset="-120"/>
+              </a:rPr>
+              <a:t>Infosys Springboard Training &amp; Internship Materials</a:t>
+            </a:r>
+            <a:endParaRPr lang="en-US" sz="1150" dirty="0"/>
+          </a:p>
+        </p:txBody>
+      </p:sp>
+    </p:spTree>
+  </p:cSld>
+  <p:clrMapOvr>
+    <a:masterClrMapping/>
+  </p:clrMapOvr>
+</p:sld>
+</file>
+
+<file path=ppt/slides/slide13.xml><?xml version="1.0" encoding="utf-8"?>
+<p:sld xmlns:a="http://schemas.openxmlformats.org/drawingml/2006/main" xmlns:r="http://schemas.openxmlformats.org/officeDocument/2006/relationships" xmlns:p="http://schemas.openxmlformats.org/presentationml/2006/main">
+  <p:cSld name="Slide 8">
+    <p:bg>
+      <p:bgPr>
+        <a:solidFill>
+          <a:srgbClr val="0A3D62"/>
+        </a:solidFill>
+        <a:effectLst/>
+      </p:bgPr>
+    </p:bg>
+    <p:spTree>
+      <p:nvGrpSpPr>
+        <p:cNvPr id="1" name=""/>
+        <p:cNvGrpSpPr/>
+        <p:nvPr/>
+      </p:nvGrpSpPr>
+      <p:grpSpPr>
+        <a:xfrm>
+          <a:off x="0" y="0"/>
+          <a:ext cx="0" cy="0"/>
+          <a:chOff x="0" y="0"/>
+          <a:chExt cx="0" cy="0"/>
+        </a:xfrm>
+      </p:grpSpPr>
+      <p:sp>
+        <p:nvSpPr>
+          <p:cNvPr id="2" name="Shape 0"/>
+          <p:cNvSpPr/>
+          <p:nvPr/>
+        </p:nvSpPr>
+        <p:spPr>
+          <a:xfrm>
+            <a:off x="4160520" y="1234440"/>
+            <a:ext cx="822960" cy="822960"/>
+          </a:xfrm>
+          <a:prstGeom prst="ellipse">
+            <a:avLst/>
+          </a:prstGeom>
+          <a:solidFill>
+            <a:srgbClr val="2AB7CA"/>
+          </a:solidFill>
+          <a:ln/>
+        </p:spPr>
+      </p:sp>
+      <p:pic>
+        <p:nvPicPr>
+          <p:cNvPr id="3" name="Image 0" descr="./icons/shieldalt.png"/>
+          <p:cNvPicPr>
+            <a:picLocks noChangeAspect="1"/>
+          </p:cNvPicPr>
+          <p:nvPr/>
+        </p:nvPicPr>
+        <p:blipFill>
+          <a:blip r:embed="rId3"/>
+          <a:stretch>
+            <a:fillRect/>
+          </a:stretch>
+        </p:blipFill>
+        <p:spPr>
+          <a:xfrm>
+            <a:off x="4358030" y="1431950"/>
+            <a:ext cx="427939" cy="427939"/>
+          </a:xfrm>
+          <a:prstGeom prst="rect">
+            <a:avLst/>
+          </a:prstGeom>
+        </p:spPr>
+      </p:pic>
+      <p:sp>
+        <p:nvSpPr>
+          <p:cNvPr id="4" name="Text 1"/>
+          <p:cNvSpPr/>
+          <p:nvPr/>
+        </p:nvSpPr>
+        <p:spPr>
+          <a:xfrm>
+            <a:off x="457200" y="2331720"/>
+            <a:ext cx="8229600" cy="822960"/>
+          </a:xfrm>
+          <a:prstGeom prst="rect">
+            <a:avLst/>
+          </a:prstGeom>
+          <a:noFill/>
+          <a:ln/>
+        </p:spPr>
+        <p:txBody>
+          <a:bodyPr wrap="square" lIns="0" tIns="0" rIns="0" bIns="0" rtlCol="0" anchor="ctr"/>
+          <a:lstStyle/>
+          <a:p>
+            <a:pPr marL="0" indent="0" algn="ctr">
+              <a:buNone/>
+            </a:pPr>
+            <a:r>
+              <a:rPr lang="en-US" sz="4000" b="1" dirty="0">
+                <a:solidFill>
+                  <a:srgbClr val="FFFFFF"/>
+                </a:solidFill>
+                <a:latin typeface="Cambria" pitchFamily="34" charset="0"/>
+                <a:ea typeface="Cambria" pitchFamily="34" charset="-122"/>
+                <a:cs typeface="Cambria" pitchFamily="34" charset="-120"/>
+              </a:rPr>
+              <a:t>Thank You</a:t>
+            </a:r>
+            <a:endParaRPr lang="en-US" sz="4000" dirty="0"/>
+          </a:p>
+        </p:txBody>
+      </p:sp>
+      <p:sp>
+        <p:nvSpPr>
+          <p:cNvPr id="5" name="Text 2"/>
+          <p:cNvSpPr/>
+          <p:nvPr/>
+        </p:nvSpPr>
+        <p:spPr>
+          <a:xfrm>
+            <a:off x="457200" y="3200400"/>
+            <a:ext cx="8229600" cy="365760"/>
+          </a:xfrm>
+          <a:prstGeom prst="rect">
+            <a:avLst/>
+          </a:prstGeom>
+          <a:noFill/>
+          <a:ln/>
+        </p:spPr>
+        <p:txBody>
+          <a:bodyPr wrap="square" lIns="0" tIns="0" rIns="0" bIns="0" rtlCol="0" anchor="ctr"/>
+          <a:lstStyle/>
+          <a:p>
+            <a:pPr marL="0" indent="0" algn="ctr">
+              <a:buNone/>
+            </a:pPr>
+            <a:endParaRPr lang="en-US" sz="1400" dirty="0"/>
+          </a:p>
+        </p:txBody>
+      </p:sp>
+    </p:spTree>
+  </p:cSld>
+  <p:clrMapOvr>
+    <a:masterClrMapping/>
+  </p:clrMapOvr>
+</p:sld>
+</file>
+
 <file path=ppt/slides/slide2.xml><?xml version="1.0" encoding="utf-8"?>
 <p:sld xmlns:a="http://schemas.openxmlformats.org/drawingml/2006/main" xmlns:r="http://schemas.openxmlformats.org/officeDocument/2006/relationships" xmlns:p="http://schemas.openxmlformats.org/presentationml/2006/main">
   <p:cSld name="Slide 2">
@@ -4671,6 +6843,588 @@
 
 <file path=ppt/slides/slide5.xml><?xml version="1.0" encoding="utf-8"?>
 <p:sld xmlns:a="http://schemas.openxmlformats.org/drawingml/2006/main" xmlns:r="http://schemas.openxmlformats.org/officeDocument/2006/relationships" xmlns:p="http://schemas.openxmlformats.org/presentationml/2006/main">
+  <p:cSld>
+    <p:spTree>
+      <p:nvGrpSpPr>
+        <p:cNvPr id="1" name=""/>
+        <p:cNvGrpSpPr/>
+        <p:nvPr/>
+      </p:nvGrpSpPr>
+      <p:grpSpPr>
+        <a:xfrm>
+          <a:off x="0" y="0"/>
+          <a:ext cx="0" cy="0"/>
+          <a:chOff x="0" y="0"/>
+          <a:chExt cx="0" cy="0"/>
+        </a:xfrm>
+      </p:grpSpPr>
+      <p:pic>
+        <p:nvPicPr>
+          <p:cNvPr id="3" name="Picture 2">
+            <a:extLst>
+              <a:ext uri="{FF2B5EF4-FFF2-40B4-BE49-F238E27FC236}">
+                <a16:creationId xmlns:a16="http://schemas.microsoft.com/office/drawing/2014/main" id="{531D7133-D52F-16C9-ED2E-3FE3DEB27D58}"/>
+              </a:ext>
+            </a:extLst>
+          </p:cNvPr>
+          <p:cNvPicPr>
+            <a:picLocks noChangeAspect="1"/>
+          </p:cNvPicPr>
+          <p:nvPr/>
+        </p:nvPicPr>
+        <p:blipFill>
+          <a:blip r:embed="rId2"/>
+          <a:stretch>
+            <a:fillRect/>
+          </a:stretch>
+        </p:blipFill>
+        <p:spPr>
+          <a:xfrm>
+            <a:off x="71847" y="1006446"/>
+            <a:ext cx="4572000" cy="4052145"/>
+          </a:xfrm>
+          <a:prstGeom prst="rect">
+            <a:avLst/>
+          </a:prstGeom>
+        </p:spPr>
+      </p:pic>
+      <p:pic>
+        <p:nvPicPr>
+          <p:cNvPr id="5" name="Picture 4">
+            <a:extLst>
+              <a:ext uri="{FF2B5EF4-FFF2-40B4-BE49-F238E27FC236}">
+                <a16:creationId xmlns:a16="http://schemas.microsoft.com/office/drawing/2014/main" id="{DC62B254-167E-C137-F827-1CCD652A55BB}"/>
+              </a:ext>
+            </a:extLst>
+          </p:cNvPr>
+          <p:cNvPicPr>
+            <a:picLocks noChangeAspect="1"/>
+          </p:cNvPicPr>
+          <p:nvPr/>
+        </p:nvPicPr>
+        <p:blipFill>
+          <a:blip r:embed="rId3"/>
+          <a:stretch>
+            <a:fillRect/>
+          </a:stretch>
+        </p:blipFill>
+        <p:spPr>
+          <a:xfrm>
+            <a:off x="4643848" y="1006446"/>
+            <a:ext cx="4428306" cy="4052144"/>
+          </a:xfrm>
+          <a:prstGeom prst="rect">
+            <a:avLst/>
+          </a:prstGeom>
+        </p:spPr>
+      </p:pic>
+      <p:sp>
+        <p:nvSpPr>
+          <p:cNvPr id="6" name="TextBox 5">
+            <a:extLst>
+              <a:ext uri="{FF2B5EF4-FFF2-40B4-BE49-F238E27FC236}">
+                <a16:creationId xmlns:a16="http://schemas.microsoft.com/office/drawing/2014/main" id="{24DD6D5E-7AAB-0709-C5C7-EC6906AC5406}"/>
+              </a:ext>
+            </a:extLst>
+          </p:cNvPr>
+          <p:cNvSpPr txBox="1"/>
+          <p:nvPr/>
+        </p:nvSpPr>
+        <p:spPr>
+          <a:xfrm>
+            <a:off x="1417319" y="498328"/>
+            <a:ext cx="1776549" cy="369332"/>
+          </a:xfrm>
+          <a:prstGeom prst="rect">
+            <a:avLst/>
+          </a:prstGeom>
+          <a:noFill/>
+        </p:spPr>
+        <p:txBody>
+          <a:bodyPr wrap="square" rtlCol="0">
+            <a:spAutoFit/>
+          </a:bodyPr>
+          <a:lstStyle/>
+          <a:p>
+            <a:r>
+              <a:rPr lang="en-US" b="1" i="1" dirty="0"/>
+              <a:t>Dashboard-1</a:t>
+            </a:r>
+            <a:endParaRPr lang="en-IN" b="1" i="1" dirty="0"/>
+          </a:p>
+        </p:txBody>
+      </p:sp>
+      <p:sp>
+        <p:nvSpPr>
+          <p:cNvPr id="10" name="TextBox 9">
+            <a:extLst>
+              <a:ext uri="{FF2B5EF4-FFF2-40B4-BE49-F238E27FC236}">
+                <a16:creationId xmlns:a16="http://schemas.microsoft.com/office/drawing/2014/main" id="{AB2BF3BE-B6B8-C0E2-1A14-584AD482C8AF}"/>
+              </a:ext>
+            </a:extLst>
+          </p:cNvPr>
+          <p:cNvSpPr txBox="1"/>
+          <p:nvPr/>
+        </p:nvSpPr>
+        <p:spPr>
+          <a:xfrm>
+            <a:off x="5950132" y="484245"/>
+            <a:ext cx="1776549" cy="369332"/>
+          </a:xfrm>
+          <a:prstGeom prst="rect">
+            <a:avLst/>
+          </a:prstGeom>
+          <a:noFill/>
+        </p:spPr>
+        <p:txBody>
+          <a:bodyPr wrap="square" rtlCol="0">
+            <a:spAutoFit/>
+          </a:bodyPr>
+          <a:lstStyle/>
+          <a:p>
+            <a:r>
+              <a:rPr lang="en-US" b="1" i="1" dirty="0"/>
+              <a:t>Dashboard-2</a:t>
+            </a:r>
+            <a:endParaRPr lang="en-IN" b="1" i="1" dirty="0"/>
+          </a:p>
+        </p:txBody>
+      </p:sp>
+    </p:spTree>
+    <p:extLst>
+      <p:ext uri="{BB962C8B-B14F-4D97-AF65-F5344CB8AC3E}">
+        <p14:creationId xmlns:p14="http://schemas.microsoft.com/office/powerpoint/2010/main" val="1365577374"/>
+      </p:ext>
+    </p:extLst>
+  </p:cSld>
+  <p:clrMapOvr>
+    <a:masterClrMapping/>
+  </p:clrMapOvr>
+</p:sld>
+</file>
+
+<file path=ppt/slides/slide6.xml><?xml version="1.0" encoding="utf-8"?>
+<p:sld xmlns:a="http://schemas.openxmlformats.org/drawingml/2006/main" xmlns:r="http://schemas.openxmlformats.org/officeDocument/2006/relationships" xmlns:p="http://schemas.openxmlformats.org/presentationml/2006/main">
+  <p:cSld>
+    <p:spTree>
+      <p:nvGrpSpPr>
+        <p:cNvPr id="1" name=""/>
+        <p:cNvGrpSpPr/>
+        <p:nvPr/>
+      </p:nvGrpSpPr>
+      <p:grpSpPr>
+        <a:xfrm>
+          <a:off x="0" y="0"/>
+          <a:ext cx="0" cy="0"/>
+          <a:chOff x="0" y="0"/>
+          <a:chExt cx="0" cy="0"/>
+        </a:xfrm>
+      </p:grpSpPr>
+      <p:pic>
+        <p:nvPicPr>
+          <p:cNvPr id="3" name="Picture 2">
+            <a:extLst>
+              <a:ext uri="{FF2B5EF4-FFF2-40B4-BE49-F238E27FC236}">
+                <a16:creationId xmlns:a16="http://schemas.microsoft.com/office/drawing/2014/main" id="{DE4DEFC1-5E81-5A06-A0C3-C899A426C495}"/>
+              </a:ext>
+            </a:extLst>
+          </p:cNvPr>
+          <p:cNvPicPr>
+            <a:picLocks noChangeAspect="1"/>
+          </p:cNvPicPr>
+          <p:nvPr/>
+        </p:nvPicPr>
+        <p:blipFill>
+          <a:blip r:embed="rId2"/>
+          <a:stretch>
+            <a:fillRect/>
+          </a:stretch>
+        </p:blipFill>
+        <p:spPr>
+          <a:xfrm>
+            <a:off x="46999" y="1077686"/>
+            <a:ext cx="4525001" cy="3977640"/>
+          </a:xfrm>
+          <a:prstGeom prst="rect">
+            <a:avLst/>
+          </a:prstGeom>
+        </p:spPr>
+      </p:pic>
+      <p:pic>
+        <p:nvPicPr>
+          <p:cNvPr id="5" name="Picture 4">
+            <a:extLst>
+              <a:ext uri="{FF2B5EF4-FFF2-40B4-BE49-F238E27FC236}">
+                <a16:creationId xmlns:a16="http://schemas.microsoft.com/office/drawing/2014/main" id="{5C5440DD-07B0-E18A-D6C7-71625EFD34D6}"/>
+              </a:ext>
+            </a:extLst>
+          </p:cNvPr>
+          <p:cNvPicPr>
+            <a:picLocks noChangeAspect="1"/>
+          </p:cNvPicPr>
+          <p:nvPr/>
+        </p:nvPicPr>
+        <p:blipFill>
+          <a:blip r:embed="rId3"/>
+          <a:stretch>
+            <a:fillRect/>
+          </a:stretch>
+        </p:blipFill>
+        <p:spPr>
+          <a:xfrm>
+            <a:off x="4572000" y="1077686"/>
+            <a:ext cx="4525001" cy="3977640"/>
+          </a:xfrm>
+          <a:prstGeom prst="rect">
+            <a:avLst/>
+          </a:prstGeom>
+        </p:spPr>
+      </p:pic>
+      <p:sp>
+        <p:nvSpPr>
+          <p:cNvPr id="7" name="TextBox 6">
+            <a:extLst>
+              <a:ext uri="{FF2B5EF4-FFF2-40B4-BE49-F238E27FC236}">
+                <a16:creationId xmlns:a16="http://schemas.microsoft.com/office/drawing/2014/main" id="{DCBB2D43-8A77-9086-2F96-06A82D5F0C9C}"/>
+              </a:ext>
+            </a:extLst>
+          </p:cNvPr>
+          <p:cNvSpPr txBox="1"/>
+          <p:nvPr/>
+        </p:nvSpPr>
+        <p:spPr>
+          <a:xfrm>
+            <a:off x="1417319" y="498328"/>
+            <a:ext cx="1776549" cy="369332"/>
+          </a:xfrm>
+          <a:prstGeom prst="rect">
+            <a:avLst/>
+          </a:prstGeom>
+          <a:noFill/>
+        </p:spPr>
+        <p:txBody>
+          <a:bodyPr wrap="square" rtlCol="0">
+            <a:spAutoFit/>
+          </a:bodyPr>
+          <a:lstStyle/>
+          <a:p>
+            <a:r>
+              <a:rPr lang="en-US" b="1" i="1" dirty="0"/>
+              <a:t>Dashboard-3</a:t>
+            </a:r>
+            <a:endParaRPr lang="en-IN" b="1" i="1" dirty="0"/>
+          </a:p>
+        </p:txBody>
+      </p:sp>
+      <p:sp>
+        <p:nvSpPr>
+          <p:cNvPr id="9" name="TextBox 8">
+            <a:extLst>
+              <a:ext uri="{FF2B5EF4-FFF2-40B4-BE49-F238E27FC236}">
+                <a16:creationId xmlns:a16="http://schemas.microsoft.com/office/drawing/2014/main" id="{7140F5A6-611F-948B-7B3D-C0913DA69C8A}"/>
+              </a:ext>
+            </a:extLst>
+          </p:cNvPr>
+          <p:cNvSpPr txBox="1"/>
+          <p:nvPr/>
+        </p:nvSpPr>
+        <p:spPr>
+          <a:xfrm>
+            <a:off x="5946225" y="498328"/>
+            <a:ext cx="1776549" cy="369332"/>
+          </a:xfrm>
+          <a:prstGeom prst="rect">
+            <a:avLst/>
+          </a:prstGeom>
+          <a:noFill/>
+        </p:spPr>
+        <p:txBody>
+          <a:bodyPr wrap="square" rtlCol="0">
+            <a:spAutoFit/>
+          </a:bodyPr>
+          <a:lstStyle/>
+          <a:p>
+            <a:r>
+              <a:rPr lang="en-US" b="1" i="1" dirty="0"/>
+              <a:t>Dashboard-4</a:t>
+            </a:r>
+            <a:endParaRPr lang="en-IN" b="1" i="1" dirty="0"/>
+          </a:p>
+        </p:txBody>
+      </p:sp>
+    </p:spTree>
+    <p:extLst>
+      <p:ext uri="{BB962C8B-B14F-4D97-AF65-F5344CB8AC3E}">
+        <p14:creationId xmlns:p14="http://schemas.microsoft.com/office/powerpoint/2010/main" val="2540653882"/>
+      </p:ext>
+    </p:extLst>
+  </p:cSld>
+  <p:clrMapOvr>
+    <a:masterClrMapping/>
+  </p:clrMapOvr>
+</p:sld>
+</file>
+
+<file path=ppt/slides/slide7.xml><?xml version="1.0" encoding="utf-8"?>
+<p:sld xmlns:a="http://schemas.openxmlformats.org/drawingml/2006/main" xmlns:r="http://schemas.openxmlformats.org/officeDocument/2006/relationships" xmlns:p="http://schemas.openxmlformats.org/presentationml/2006/main">
+  <p:cSld>
+    <p:spTree>
+      <p:nvGrpSpPr>
+        <p:cNvPr id="1" name=""/>
+        <p:cNvGrpSpPr/>
+        <p:nvPr/>
+      </p:nvGrpSpPr>
+      <p:grpSpPr>
+        <a:xfrm>
+          <a:off x="0" y="0"/>
+          <a:ext cx="0" cy="0"/>
+          <a:chOff x="0" y="0"/>
+          <a:chExt cx="0" cy="0"/>
+        </a:xfrm>
+      </p:grpSpPr>
+      <p:pic>
+        <p:nvPicPr>
+          <p:cNvPr id="3" name="Picture 2">
+            <a:extLst>
+              <a:ext uri="{FF2B5EF4-FFF2-40B4-BE49-F238E27FC236}">
+                <a16:creationId xmlns:a16="http://schemas.microsoft.com/office/drawing/2014/main" id="{828CD92D-3B1D-45F1-6A2F-860BCDC23558}"/>
+              </a:ext>
+            </a:extLst>
+          </p:cNvPr>
+          <p:cNvPicPr>
+            <a:picLocks noChangeAspect="1"/>
+          </p:cNvPicPr>
+          <p:nvPr/>
+        </p:nvPicPr>
+        <p:blipFill>
+          <a:blip r:embed="rId2"/>
+          <a:stretch>
+            <a:fillRect/>
+          </a:stretch>
+        </p:blipFill>
+        <p:spPr>
+          <a:xfrm>
+            <a:off x="58783" y="1058092"/>
+            <a:ext cx="4513218" cy="4010298"/>
+          </a:xfrm>
+          <a:prstGeom prst="rect">
+            <a:avLst/>
+          </a:prstGeom>
+        </p:spPr>
+      </p:pic>
+      <p:pic>
+        <p:nvPicPr>
+          <p:cNvPr id="5" name="Picture 4">
+            <a:extLst>
+              <a:ext uri="{FF2B5EF4-FFF2-40B4-BE49-F238E27FC236}">
+                <a16:creationId xmlns:a16="http://schemas.microsoft.com/office/drawing/2014/main" id="{C22E28BE-2EA3-7BB4-67BC-AC47BB51EE0B}"/>
+              </a:ext>
+            </a:extLst>
+          </p:cNvPr>
+          <p:cNvPicPr>
+            <a:picLocks noChangeAspect="1"/>
+          </p:cNvPicPr>
+          <p:nvPr/>
+        </p:nvPicPr>
+        <p:blipFill>
+          <a:blip r:embed="rId3"/>
+          <a:stretch>
+            <a:fillRect/>
+          </a:stretch>
+        </p:blipFill>
+        <p:spPr>
+          <a:xfrm>
+            <a:off x="4618072" y="1058092"/>
+            <a:ext cx="4467145" cy="4010298"/>
+          </a:xfrm>
+          <a:prstGeom prst="rect">
+            <a:avLst/>
+          </a:prstGeom>
+        </p:spPr>
+      </p:pic>
+      <p:sp>
+        <p:nvSpPr>
+          <p:cNvPr id="7" name="TextBox 6">
+            <a:extLst>
+              <a:ext uri="{FF2B5EF4-FFF2-40B4-BE49-F238E27FC236}">
+                <a16:creationId xmlns:a16="http://schemas.microsoft.com/office/drawing/2014/main" id="{3FD3A0B9-A8AB-5CD2-91DD-8C5F86B20169}"/>
+              </a:ext>
+            </a:extLst>
+          </p:cNvPr>
+          <p:cNvSpPr txBox="1"/>
+          <p:nvPr/>
+        </p:nvSpPr>
+        <p:spPr>
+          <a:xfrm>
+            <a:off x="1193076" y="498328"/>
+            <a:ext cx="1776549" cy="369332"/>
+          </a:xfrm>
+          <a:prstGeom prst="rect">
+            <a:avLst/>
+          </a:prstGeom>
+          <a:noFill/>
+        </p:spPr>
+        <p:txBody>
+          <a:bodyPr wrap="square" rtlCol="0">
+            <a:spAutoFit/>
+          </a:bodyPr>
+          <a:lstStyle/>
+          <a:p>
+            <a:r>
+              <a:rPr lang="en-US" b="1" i="1" dirty="0"/>
+              <a:t>Dashboard-5</a:t>
+            </a:r>
+            <a:endParaRPr lang="en-IN" b="1" i="1" dirty="0"/>
+          </a:p>
+        </p:txBody>
+      </p:sp>
+      <p:sp>
+        <p:nvSpPr>
+          <p:cNvPr id="9" name="TextBox 8">
+            <a:extLst>
+              <a:ext uri="{FF2B5EF4-FFF2-40B4-BE49-F238E27FC236}">
+                <a16:creationId xmlns:a16="http://schemas.microsoft.com/office/drawing/2014/main" id="{26FBA0AA-6C61-C2FD-E31D-69DF3F5EC8C0}"/>
+              </a:ext>
+            </a:extLst>
+          </p:cNvPr>
+          <p:cNvSpPr txBox="1"/>
+          <p:nvPr/>
+        </p:nvSpPr>
+        <p:spPr>
+          <a:xfrm>
+            <a:off x="6174377" y="498328"/>
+            <a:ext cx="1776549" cy="369332"/>
+          </a:xfrm>
+          <a:prstGeom prst="rect">
+            <a:avLst/>
+          </a:prstGeom>
+          <a:noFill/>
+        </p:spPr>
+        <p:txBody>
+          <a:bodyPr wrap="square" rtlCol="0">
+            <a:spAutoFit/>
+          </a:bodyPr>
+          <a:lstStyle/>
+          <a:p>
+            <a:r>
+              <a:rPr lang="en-US" b="1" i="1" dirty="0"/>
+              <a:t>Dashboard-6</a:t>
+            </a:r>
+            <a:endParaRPr lang="en-IN" b="1" i="1" dirty="0"/>
+          </a:p>
+        </p:txBody>
+      </p:sp>
+    </p:spTree>
+    <p:extLst>
+      <p:ext uri="{BB962C8B-B14F-4D97-AF65-F5344CB8AC3E}">
+        <p14:creationId xmlns:p14="http://schemas.microsoft.com/office/powerpoint/2010/main" val="1260899107"/>
+      </p:ext>
+    </p:extLst>
+  </p:cSld>
+  <p:clrMapOvr>
+    <a:masterClrMapping/>
+  </p:clrMapOvr>
+</p:sld>
+</file>
+
+<file path=ppt/slides/slide8.xml><?xml version="1.0" encoding="utf-8"?>
+<p:sld xmlns:a="http://schemas.openxmlformats.org/drawingml/2006/main" xmlns:r="http://schemas.openxmlformats.org/officeDocument/2006/relationships" xmlns:p="http://schemas.openxmlformats.org/presentationml/2006/main">
+  <p:cSld>
+    <p:spTree>
+      <p:nvGrpSpPr>
+        <p:cNvPr id="1" name=""/>
+        <p:cNvGrpSpPr/>
+        <p:nvPr/>
+      </p:nvGrpSpPr>
+      <p:grpSpPr>
+        <a:xfrm>
+          <a:off x="0" y="0"/>
+          <a:ext cx="0" cy="0"/>
+          <a:chOff x="0" y="0"/>
+          <a:chExt cx="0" cy="0"/>
+        </a:xfrm>
+      </p:grpSpPr>
+      <p:pic>
+        <p:nvPicPr>
+          <p:cNvPr id="3" name="Picture 2">
+            <a:extLst>
+              <a:ext uri="{FF2B5EF4-FFF2-40B4-BE49-F238E27FC236}">
+                <a16:creationId xmlns:a16="http://schemas.microsoft.com/office/drawing/2014/main" id="{DF046F03-01D3-A360-7B9B-2410A94130D9}"/>
+              </a:ext>
+            </a:extLst>
+          </p:cNvPr>
+          <p:cNvPicPr>
+            <a:picLocks noChangeAspect="1"/>
+          </p:cNvPicPr>
+          <p:nvPr/>
+        </p:nvPicPr>
+        <p:blipFill>
+          <a:blip r:embed="rId2"/>
+          <a:stretch>
+            <a:fillRect/>
+          </a:stretch>
+        </p:blipFill>
+        <p:spPr>
+          <a:xfrm>
+            <a:off x="84909" y="927463"/>
+            <a:ext cx="8980714" cy="4167051"/>
+          </a:xfrm>
+          <a:prstGeom prst="rect">
+            <a:avLst/>
+          </a:prstGeom>
+        </p:spPr>
+      </p:pic>
+      <p:sp>
+        <p:nvSpPr>
+          <p:cNvPr id="5" name="TextBox 4">
+            <a:extLst>
+              <a:ext uri="{FF2B5EF4-FFF2-40B4-BE49-F238E27FC236}">
+                <a16:creationId xmlns:a16="http://schemas.microsoft.com/office/drawing/2014/main" id="{7F402076-5703-EC34-873C-97BF7CB7BCA4}"/>
+              </a:ext>
+            </a:extLst>
+          </p:cNvPr>
+          <p:cNvSpPr txBox="1"/>
+          <p:nvPr/>
+        </p:nvSpPr>
+        <p:spPr>
+          <a:xfrm>
+            <a:off x="3631473" y="387294"/>
+            <a:ext cx="1776549" cy="369332"/>
+          </a:xfrm>
+          <a:prstGeom prst="rect">
+            <a:avLst/>
+          </a:prstGeom>
+          <a:noFill/>
+        </p:spPr>
+        <p:txBody>
+          <a:bodyPr wrap="square" rtlCol="0">
+            <a:spAutoFit/>
+          </a:bodyPr>
+          <a:lstStyle/>
+          <a:p>
+            <a:r>
+              <a:rPr lang="en-US" b="1" i="1" dirty="0"/>
+              <a:t>Dashboard-7</a:t>
+            </a:r>
+            <a:endParaRPr lang="en-IN" b="1" i="1" dirty="0"/>
+          </a:p>
+        </p:txBody>
+      </p:sp>
+    </p:spTree>
+    <p:extLst>
+      <p:ext uri="{BB962C8B-B14F-4D97-AF65-F5344CB8AC3E}">
+        <p14:creationId xmlns:p14="http://schemas.microsoft.com/office/powerpoint/2010/main" val="2692528952"/>
+      </p:ext>
+    </p:extLst>
+  </p:cSld>
+  <p:clrMapOvr>
+    <a:masterClrMapping/>
+  </p:clrMapOvr>
+</p:sld>
+</file>
+
+<file path=ppt/slides/slide9.xml><?xml version="1.0" encoding="utf-8"?>
+<p:sld xmlns:a="http://schemas.openxmlformats.org/drawingml/2006/main" xmlns:r="http://schemas.openxmlformats.org/officeDocument/2006/relationships" xmlns:p="http://schemas.openxmlformats.org/presentationml/2006/main">
   <p:cSld name="Slide 4">
     <p:bg>
       <p:bgPr>
@@ -5515,2174 +8269,6 @@
               <a:t>Implemented the complete 12-step preprocessing workflow</a:t>
             </a:r>
             <a:endParaRPr lang="en-US" sz="1050" dirty="0"/>
-          </a:p>
-        </p:txBody>
-      </p:sp>
-    </p:spTree>
-  </p:cSld>
-  <p:clrMapOvr>
-    <a:masterClrMapping/>
-  </p:clrMapOvr>
-</p:sld>
-</file>
-
-<file path=ppt/slides/slide6.xml><?xml version="1.0" encoding="utf-8"?>
-<p:sld xmlns:a="http://schemas.openxmlformats.org/drawingml/2006/main" xmlns:r="http://schemas.openxmlformats.org/officeDocument/2006/relationships" xmlns:p="http://schemas.openxmlformats.org/presentationml/2006/main">
-  <p:cSld name="Slide 5">
-    <p:bg>
-      <p:bgPr>
-        <a:blipFill dpi="0" rotWithShape="1">
-          <a:blip r:embed="rId3">
-            <a:lum/>
-          </a:blip>
-          <a:srcRect/>
-          <a:stretch>
-            <a:fillRect/>
-          </a:stretch>
-        </a:blipFill>
-        <a:effectLst/>
-      </p:bgPr>
-    </p:bg>
-    <p:spTree>
-      <p:nvGrpSpPr>
-        <p:cNvPr id="1" name=""/>
-        <p:cNvGrpSpPr/>
-        <p:nvPr/>
-      </p:nvGrpSpPr>
-      <p:grpSpPr>
-        <a:xfrm>
-          <a:off x="0" y="0"/>
-          <a:ext cx="0" cy="0"/>
-          <a:chOff x="0" y="0"/>
-          <a:chExt cx="0" cy="0"/>
-        </a:xfrm>
-      </p:grpSpPr>
-      <p:sp>
-        <p:nvSpPr>
-          <p:cNvPr id="2" name="Text 0"/>
-          <p:cNvSpPr/>
-          <p:nvPr/>
-        </p:nvSpPr>
-        <p:spPr>
-          <a:xfrm>
-            <a:off x="457200" y="384048"/>
-            <a:ext cx="8229600" cy="548640"/>
-          </a:xfrm>
-          <a:prstGeom prst="rect">
-            <a:avLst/>
-          </a:prstGeom>
-          <a:noFill/>
-          <a:ln/>
-        </p:spPr>
-        <p:txBody>
-          <a:bodyPr wrap="square" lIns="0" tIns="0" rIns="0" bIns="0" rtlCol="0" anchor="ctr"/>
-          <a:lstStyle/>
-          <a:p>
-            <a:pPr marL="0" indent="0" algn="l">
-              <a:buNone/>
-            </a:pPr>
-            <a:r>
-              <a:rPr lang="en-US" sz="2600" b="1" dirty="0">
-                <a:solidFill>
-                  <a:srgbClr val="0A3D62"/>
-                </a:solidFill>
-                <a:latin typeface="Cambria" pitchFamily="34" charset="0"/>
-                <a:ea typeface="Cambria" pitchFamily="34" charset="-122"/>
-                <a:cs typeface="Cambria" pitchFamily="34" charset="-120"/>
-              </a:rPr>
-              <a:t>Future Enhancements &amp; Key Insights</a:t>
-            </a:r>
-            <a:endParaRPr lang="en-US" sz="2600" dirty="0"/>
-          </a:p>
-        </p:txBody>
-      </p:sp>
-      <p:sp>
-        <p:nvSpPr>
-          <p:cNvPr id="3" name="Text 1"/>
-          <p:cNvSpPr/>
-          <p:nvPr/>
-        </p:nvSpPr>
-        <p:spPr>
-          <a:xfrm>
-            <a:off x="457200" y="1005840"/>
-            <a:ext cx="3657600" cy="256032"/>
-          </a:xfrm>
-          <a:prstGeom prst="rect">
-            <a:avLst/>
-          </a:prstGeom>
-          <a:noFill/>
-          <a:ln/>
-        </p:spPr>
-        <p:txBody>
-          <a:bodyPr wrap="square" lIns="0" tIns="0" rIns="0" bIns="0" rtlCol="0" anchor="ctr"/>
-          <a:lstStyle/>
-          <a:p>
-            <a:pPr marL="0" indent="0">
-              <a:buNone/>
-            </a:pPr>
-            <a:r>
-              <a:rPr lang="en-US" sz="1150" b="1" kern="0" spc="100" dirty="0">
-                <a:solidFill>
-                  <a:srgbClr val="2AB7CA"/>
-                </a:solidFill>
-                <a:latin typeface="Calibri" pitchFamily="34" charset="0"/>
-                <a:ea typeface="Calibri" pitchFamily="34" charset="-122"/>
-                <a:cs typeface="Calibri" pitchFamily="34" charset="-120"/>
-              </a:rPr>
-              <a:t>FUTURE ENHANCEMENTS</a:t>
-            </a:r>
-            <a:endParaRPr lang="en-US" sz="1150" dirty="0"/>
-          </a:p>
-        </p:txBody>
-      </p:sp>
-      <p:sp>
-        <p:nvSpPr>
-          <p:cNvPr id="4" name="Shape 2"/>
-          <p:cNvSpPr/>
-          <p:nvPr/>
-        </p:nvSpPr>
-        <p:spPr>
-          <a:xfrm>
-            <a:off x="457200" y="1335024"/>
-            <a:ext cx="384048" cy="384048"/>
-          </a:xfrm>
-          <a:prstGeom prst="ellipse">
-            <a:avLst/>
-          </a:prstGeom>
-          <a:solidFill>
-            <a:srgbClr val="0A3D62"/>
-          </a:solidFill>
-          <a:ln/>
-        </p:spPr>
-      </p:sp>
-      <p:pic>
-        <p:nvPicPr>
-          <p:cNvPr id="5" name="Image 0" descr="./icons/bolt.png"/>
-          <p:cNvPicPr>
-            <a:picLocks noChangeAspect="1"/>
-          </p:cNvPicPr>
-          <p:nvPr/>
-        </p:nvPicPr>
-        <p:blipFill>
-          <a:blip r:embed="rId4"/>
-          <a:stretch>
-            <a:fillRect/>
-          </a:stretch>
-        </p:blipFill>
-        <p:spPr>
-          <a:xfrm>
-            <a:off x="549372" y="1427196"/>
-            <a:ext cx="199705" cy="199705"/>
-          </a:xfrm>
-          <a:prstGeom prst="rect">
-            <a:avLst/>
-          </a:prstGeom>
-        </p:spPr>
-      </p:pic>
-      <p:sp>
-        <p:nvSpPr>
-          <p:cNvPr id="6" name="Text 3"/>
-          <p:cNvSpPr/>
-          <p:nvPr/>
-        </p:nvSpPr>
-        <p:spPr>
-          <a:xfrm>
-            <a:off x="969264" y="1307592"/>
-            <a:ext cx="3200400" cy="566928"/>
-          </a:xfrm>
-          <a:prstGeom prst="rect">
-            <a:avLst/>
-          </a:prstGeom>
-          <a:noFill/>
-          <a:ln/>
-        </p:spPr>
-        <p:txBody>
-          <a:bodyPr wrap="square" lIns="0" tIns="0" rIns="0" bIns="0" rtlCol="0" anchor="ctr"/>
-          <a:lstStyle/>
-          <a:p>
-            <a:pPr marL="0" indent="0">
-              <a:lnSpc>
-                <a:spcPct val="105000"/>
-              </a:lnSpc>
-              <a:buNone/>
-            </a:pPr>
-            <a:r>
-              <a:rPr lang="en-US" sz="1000" dirty="0">
-                <a:solidFill>
-                  <a:srgbClr val="1C2B33"/>
-                </a:solidFill>
-                <a:latin typeface="Calibri" pitchFamily="34" charset="0"/>
-                <a:ea typeface="Calibri" pitchFamily="34" charset="-122"/>
-                <a:cs typeface="Calibri" pitchFamily="34" charset="-120"/>
-              </a:rPr>
-              <a:t>Real-time threat monitoring</a:t>
-            </a:r>
-            <a:endParaRPr lang="en-US" sz="1000" dirty="0"/>
-          </a:p>
-        </p:txBody>
-      </p:sp>
-      <p:sp>
-        <p:nvSpPr>
-          <p:cNvPr id="7" name="Shape 4"/>
-          <p:cNvSpPr/>
-          <p:nvPr/>
-        </p:nvSpPr>
-        <p:spPr>
-          <a:xfrm>
-            <a:off x="457200" y="1901952"/>
-            <a:ext cx="384048" cy="384048"/>
-          </a:xfrm>
-          <a:prstGeom prst="ellipse">
-            <a:avLst/>
-          </a:prstGeom>
-          <a:solidFill>
-            <a:srgbClr val="0A3D62"/>
-          </a:solidFill>
-          <a:ln/>
-        </p:spPr>
-      </p:sp>
-      <p:pic>
-        <p:nvPicPr>
-          <p:cNvPr id="8" name="Image 1" descr="./icons/bell.png"/>
-          <p:cNvPicPr>
-            <a:picLocks noChangeAspect="1"/>
-          </p:cNvPicPr>
-          <p:nvPr/>
-        </p:nvPicPr>
-        <p:blipFill>
-          <a:blip r:embed="rId5"/>
-          <a:stretch>
-            <a:fillRect/>
-          </a:stretch>
-        </p:blipFill>
-        <p:spPr>
-          <a:xfrm>
-            <a:off x="549372" y="1994124"/>
-            <a:ext cx="199705" cy="199705"/>
-          </a:xfrm>
-          <a:prstGeom prst="rect">
-            <a:avLst/>
-          </a:prstGeom>
-        </p:spPr>
-      </p:pic>
-      <p:sp>
-        <p:nvSpPr>
-          <p:cNvPr id="9" name="Text 5"/>
-          <p:cNvSpPr/>
-          <p:nvPr/>
-        </p:nvSpPr>
-        <p:spPr>
-          <a:xfrm>
-            <a:off x="969264" y="1874520"/>
-            <a:ext cx="3200400" cy="566928"/>
-          </a:xfrm>
-          <a:prstGeom prst="rect">
-            <a:avLst/>
-          </a:prstGeom>
-          <a:noFill/>
-          <a:ln/>
-        </p:spPr>
-        <p:txBody>
-          <a:bodyPr wrap="square" lIns="0" tIns="0" rIns="0" bIns="0" rtlCol="0" anchor="ctr"/>
-          <a:lstStyle/>
-          <a:p>
-            <a:pPr marL="0" indent="0">
-              <a:lnSpc>
-                <a:spcPct val="105000"/>
-              </a:lnSpc>
-              <a:buNone/>
-            </a:pPr>
-            <a:r>
-              <a:rPr lang="en-US" sz="1000" dirty="0">
-                <a:solidFill>
-                  <a:srgbClr val="1C2B33"/>
-                </a:solidFill>
-                <a:latin typeface="Calibri" pitchFamily="34" charset="0"/>
-                <a:ea typeface="Calibri" pitchFamily="34" charset="-122"/>
-                <a:cs typeface="Calibri" pitchFamily="34" charset="-120"/>
-              </a:rPr>
-              <a:t>Automated threat alerts &amp; notifications</a:t>
-            </a:r>
-            <a:endParaRPr lang="en-US" sz="1000" dirty="0"/>
-          </a:p>
-        </p:txBody>
-      </p:sp>
-      <p:sp>
-        <p:nvSpPr>
-          <p:cNvPr id="10" name="Shape 6"/>
-          <p:cNvSpPr/>
-          <p:nvPr/>
-        </p:nvSpPr>
-        <p:spPr>
-          <a:xfrm>
-            <a:off x="457200" y="2468880"/>
-            <a:ext cx="384048" cy="384048"/>
-          </a:xfrm>
-          <a:prstGeom prst="ellipse">
-            <a:avLst/>
-          </a:prstGeom>
-          <a:solidFill>
-            <a:srgbClr val="0A3D62"/>
-          </a:solidFill>
-          <a:ln/>
-        </p:spPr>
-      </p:sp>
-      <p:pic>
-        <p:nvPicPr>
-          <p:cNvPr id="11" name="Image 2" descr="./icons/database.png"/>
-          <p:cNvPicPr>
-            <a:picLocks noChangeAspect="1"/>
-          </p:cNvPicPr>
-          <p:nvPr/>
-        </p:nvPicPr>
-        <p:blipFill>
-          <a:blip r:embed="rId6"/>
-          <a:stretch>
-            <a:fillRect/>
-          </a:stretch>
-        </p:blipFill>
-        <p:spPr>
-          <a:xfrm>
-            <a:off x="549372" y="2561052"/>
-            <a:ext cx="199705" cy="199705"/>
-          </a:xfrm>
-          <a:prstGeom prst="rect">
-            <a:avLst/>
-          </a:prstGeom>
-        </p:spPr>
-      </p:pic>
-      <p:sp>
-        <p:nvSpPr>
-          <p:cNvPr id="12" name="Text 7"/>
-          <p:cNvSpPr/>
-          <p:nvPr/>
-        </p:nvSpPr>
-        <p:spPr>
-          <a:xfrm>
-            <a:off x="969264" y="2441448"/>
-            <a:ext cx="3200400" cy="566928"/>
-          </a:xfrm>
-          <a:prstGeom prst="rect">
-            <a:avLst/>
-          </a:prstGeom>
-          <a:noFill/>
-          <a:ln/>
-        </p:spPr>
-        <p:txBody>
-          <a:bodyPr wrap="square" lIns="0" tIns="0" rIns="0" bIns="0" rtlCol="0" anchor="ctr"/>
-          <a:lstStyle/>
-          <a:p>
-            <a:pPr marL="0" indent="0">
-              <a:lnSpc>
-                <a:spcPct val="105000"/>
-              </a:lnSpc>
-              <a:buNone/>
-            </a:pPr>
-            <a:r>
-              <a:rPr lang="en-US" sz="1000" dirty="0">
-                <a:solidFill>
-                  <a:srgbClr val="1C2B33"/>
-                </a:solidFill>
-                <a:latin typeface="Calibri" pitchFamily="34" charset="0"/>
-                <a:ea typeface="Calibri" pitchFamily="34" charset="-122"/>
-                <a:cs typeface="Calibri" pitchFamily="34" charset="-120"/>
-              </a:rPr>
-              <a:t>Integration with additional cybersecurity datasets</a:t>
-            </a:r>
-            <a:endParaRPr lang="en-US" sz="1000" dirty="0"/>
-          </a:p>
-        </p:txBody>
-      </p:sp>
-      <p:sp>
-        <p:nvSpPr>
-          <p:cNvPr id="13" name="Shape 8"/>
-          <p:cNvSpPr/>
-          <p:nvPr/>
-        </p:nvSpPr>
-        <p:spPr>
-          <a:xfrm>
-            <a:off x="457200" y="3035808"/>
-            <a:ext cx="384048" cy="384048"/>
-          </a:xfrm>
-          <a:prstGeom prst="ellipse">
-            <a:avLst/>
-          </a:prstGeom>
-          <a:solidFill>
-            <a:srgbClr val="0A3D62"/>
-          </a:solidFill>
-          <a:ln/>
-        </p:spPr>
-      </p:sp>
-      <p:pic>
-        <p:nvPicPr>
-          <p:cNvPr id="14" name="Image 3" descr="./icons/brain.png"/>
-          <p:cNvPicPr>
-            <a:picLocks noChangeAspect="1"/>
-          </p:cNvPicPr>
-          <p:nvPr/>
-        </p:nvPicPr>
-        <p:blipFill>
-          <a:blip r:embed="rId7"/>
-          <a:stretch>
-            <a:fillRect/>
-          </a:stretch>
-        </p:blipFill>
-        <p:spPr>
-          <a:xfrm>
-            <a:off x="549372" y="3127980"/>
-            <a:ext cx="199705" cy="199705"/>
-          </a:xfrm>
-          <a:prstGeom prst="rect">
-            <a:avLst/>
-          </a:prstGeom>
-        </p:spPr>
-      </p:pic>
-      <p:sp>
-        <p:nvSpPr>
-          <p:cNvPr id="15" name="Text 9"/>
-          <p:cNvSpPr/>
-          <p:nvPr/>
-        </p:nvSpPr>
-        <p:spPr>
-          <a:xfrm>
-            <a:off x="969264" y="3008376"/>
-            <a:ext cx="3200400" cy="566928"/>
-          </a:xfrm>
-          <a:prstGeom prst="rect">
-            <a:avLst/>
-          </a:prstGeom>
-          <a:noFill/>
-          <a:ln/>
-        </p:spPr>
-        <p:txBody>
-          <a:bodyPr wrap="square" lIns="0" tIns="0" rIns="0" bIns="0" rtlCol="0" anchor="ctr"/>
-          <a:lstStyle/>
-          <a:p>
-            <a:pPr marL="0" indent="0">
-              <a:lnSpc>
-                <a:spcPct val="105000"/>
-              </a:lnSpc>
-              <a:buNone/>
-            </a:pPr>
-            <a:r>
-              <a:rPr lang="en-US" sz="1000" dirty="0">
-                <a:solidFill>
-                  <a:srgbClr val="1C2B33"/>
-                </a:solidFill>
-                <a:latin typeface="Calibri" pitchFamily="34" charset="0"/>
-                <a:ea typeface="Calibri" pitchFamily="34" charset="-122"/>
-                <a:cs typeface="Calibri" pitchFamily="34" charset="-120"/>
-              </a:rPr>
-              <a:t>AI/ML-based threat prediction &amp; anomaly detection</a:t>
-            </a:r>
-            <a:endParaRPr lang="en-US" sz="1000" dirty="0"/>
-          </a:p>
-        </p:txBody>
-      </p:sp>
-      <p:sp>
-        <p:nvSpPr>
-          <p:cNvPr id="16" name="Text 10"/>
-          <p:cNvSpPr/>
-          <p:nvPr/>
-        </p:nvSpPr>
-        <p:spPr>
-          <a:xfrm>
-            <a:off x="457200" y="3657600"/>
-            <a:ext cx="3657600" cy="237744"/>
-          </a:xfrm>
-          <a:prstGeom prst="rect">
-            <a:avLst/>
-          </a:prstGeom>
-          <a:noFill/>
-          <a:ln/>
-        </p:spPr>
-        <p:txBody>
-          <a:bodyPr wrap="square" lIns="0" tIns="0" rIns="0" bIns="0" rtlCol="0" anchor="ctr"/>
-          <a:lstStyle/>
-          <a:p>
-            <a:pPr marL="0" indent="0">
-              <a:buNone/>
-            </a:pPr>
-            <a:r>
-              <a:rPr lang="en-US" sz="1150" b="1" kern="0" spc="100" dirty="0">
-                <a:solidFill>
-                  <a:srgbClr val="2AB7CA"/>
-                </a:solidFill>
-                <a:latin typeface="Calibri" pitchFamily="34" charset="0"/>
-                <a:ea typeface="Calibri" pitchFamily="34" charset="-122"/>
-                <a:cs typeface="Calibri" pitchFamily="34" charset="-120"/>
-              </a:rPr>
-              <a:t>KEY INSIGHTS</a:t>
-            </a:r>
-            <a:endParaRPr lang="en-US" sz="1150" dirty="0"/>
-          </a:p>
-        </p:txBody>
-      </p:sp>
-      <p:sp>
-        <p:nvSpPr>
-          <p:cNvPr id="17" name="Text 11"/>
-          <p:cNvSpPr/>
-          <p:nvPr/>
-        </p:nvSpPr>
-        <p:spPr>
-          <a:xfrm>
-            <a:off x="457200" y="3931920"/>
-            <a:ext cx="3749040" cy="1051560"/>
-          </a:xfrm>
-          <a:prstGeom prst="rect">
-            <a:avLst/>
-          </a:prstGeom>
-          <a:noFill/>
-          <a:ln/>
-        </p:spPr>
-        <p:txBody>
-          <a:bodyPr wrap="square" lIns="0" tIns="0" rIns="0" bIns="0" rtlCol="0" anchor="t"/>
-          <a:lstStyle/>
-          <a:p>
-            <a:pPr marL="0" indent="0">
-              <a:lnSpc>
-                <a:spcPct val="120000"/>
-              </a:lnSpc>
-              <a:buNone/>
-            </a:pPr>
-            <a:r>
-              <a:rPr lang="en-US" sz="970" b="1" dirty="0">
-                <a:solidFill>
-                  <a:srgbClr val="0A3D62"/>
-                </a:solidFill>
-                <a:latin typeface="Calibri" pitchFamily="34" charset="0"/>
-                <a:ea typeface="Calibri" pitchFamily="34" charset="-122"/>
-                <a:cs typeface="Calibri" pitchFamily="34" charset="-120"/>
-              </a:rPr>
-              <a:t>44.60 </a:t>
-            </a:r>
-            <a:r>
-              <a:rPr lang="en-US" sz="970" dirty="0">
-                <a:solidFill>
-                  <a:srgbClr val="1C2B33"/>
-                </a:solidFill>
-                <a:latin typeface="Calibri" pitchFamily="34" charset="0"/>
-                <a:ea typeface="Calibri" pitchFamily="34" charset="-122"/>
-                <a:cs typeface="Calibri" pitchFamily="34" charset="-120"/>
-              </a:rPr>
-              <a:t>Network Risk Index — above the 40 elevated-risk threshold
-</a:t>
-            </a:r>
-            <a:r>
-              <a:rPr lang="en-US" sz="970" b="1" dirty="0">
-                <a:solidFill>
-                  <a:srgbClr val="0A3D62"/>
-                </a:solidFill>
-                <a:latin typeface="Calibri" pitchFamily="34" charset="0"/>
-                <a:ea typeface="Calibri" pitchFamily="34" charset="-122"/>
-                <a:cs typeface="Calibri" pitchFamily="34" charset="-120"/>
-              </a:rPr>
-              <a:t>50.11% </a:t>
-            </a:r>
-            <a:r>
-              <a:rPr lang="en-US" sz="970" dirty="0">
-                <a:solidFill>
-                  <a:srgbClr val="1C2B33"/>
-                </a:solidFill>
-                <a:latin typeface="Calibri" pitchFamily="34" charset="0"/>
-                <a:ea typeface="Calibri" pitchFamily="34" charset="-122"/>
-                <a:cs typeface="Calibri" pitchFamily="34" charset="-120"/>
-              </a:rPr>
-              <a:t>detection rate; </a:t>
-            </a:r>
-            <a:r>
-              <a:rPr lang="en-US" sz="970" b="1" dirty="0">
-                <a:solidFill>
-                  <a:srgbClr val="0A3D62"/>
-                </a:solidFill>
-                <a:latin typeface="Calibri" pitchFamily="34" charset="0"/>
-                <a:ea typeface="Calibri" pitchFamily="34" charset="-122"/>
-                <a:cs typeface="Calibri" pitchFamily="34" charset="-120"/>
-              </a:rPr>
-              <a:t>49.99% </a:t>
-            </a:r>
-            <a:r>
-              <a:rPr lang="en-US" sz="970" dirty="0">
-                <a:solidFill>
-                  <a:srgbClr val="1C2B33"/>
-                </a:solidFill>
-                <a:latin typeface="Calibri" pitchFamily="34" charset="0"/>
-                <a:ea typeface="Calibri" pitchFamily="34" charset="-122"/>
-                <a:cs typeface="Calibri" pitchFamily="34" charset="-120"/>
-              </a:rPr>
-              <a:t>of traffic actively blocked
-</a:t>
-            </a:r>
-            <a:r>
-              <a:rPr lang="en-US" sz="970" b="1" dirty="0">
-                <a:solidFill>
-                  <a:srgbClr val="0A3D62"/>
-                </a:solidFill>
-                <a:latin typeface="Calibri" pitchFamily="34" charset="0"/>
-                <a:ea typeface="Calibri" pitchFamily="34" charset="-122"/>
-                <a:cs typeface="Calibri" pitchFamily="34" charset="-120"/>
-              </a:rPr>
-              <a:t>SSH </a:t>
-            </a:r>
-            <a:r>
-              <a:rPr lang="en-US" sz="970" dirty="0">
-                <a:solidFill>
-                  <a:srgbClr val="1C2B33"/>
-                </a:solidFill>
-                <a:latin typeface="Calibri" pitchFamily="34" charset="0"/>
-                <a:ea typeface="Calibri" pitchFamily="34" charset="-122"/>
-                <a:cs typeface="Calibri" pitchFamily="34" charset="-120"/>
-              </a:rPr>
-              <a:t>recorded the highest share of critical breaches</a:t>
-            </a:r>
-            <a:endParaRPr lang="en-US" sz="970" dirty="0"/>
-          </a:p>
-        </p:txBody>
-      </p:sp>
-      <p:sp>
-        <p:nvSpPr>
-          <p:cNvPr id="18" name="Shape 12"/>
-          <p:cNvSpPr/>
-          <p:nvPr/>
-        </p:nvSpPr>
-        <p:spPr>
-          <a:xfrm>
-            <a:off x="4526280" y="1005840"/>
-            <a:ext cx="4251960" cy="2743200"/>
-          </a:xfrm>
-          <a:prstGeom prst="roundRect">
-            <a:avLst>
-              <a:gd name="adj" fmla="val 2000"/>
-            </a:avLst>
-          </a:prstGeom>
-          <a:solidFill>
-            <a:srgbClr val="0F1621"/>
-          </a:solidFill>
-          <a:ln w="12700">
-            <a:solidFill>
-              <a:srgbClr val="D8E3E8"/>
-            </a:solidFill>
-            <a:prstDash val="solid"/>
-          </a:ln>
-          <a:effectLst>
-            <a:outerShdw blurRad="101600" dist="25400" dir="5400000" algn="bl" rotWithShape="0">
-              <a:srgbClr val="000000">
-                <a:alpha val="12000"/>
-              </a:srgbClr>
-            </a:outerShdw>
-          </a:effectLst>
-        </p:spPr>
-      </p:sp>
-      <p:pic>
-        <p:nvPicPr>
-          <p:cNvPr id="19" name="Image 4" descr="./assets/dash7_main.jpg"/>
-          <p:cNvPicPr>
-            <a:picLocks noChangeAspect="1"/>
-          </p:cNvPicPr>
-          <p:nvPr/>
-        </p:nvPicPr>
-        <p:blipFill>
-          <a:blip r:embed="rId8"/>
-          <a:stretch>
-            <a:fillRect/>
-          </a:stretch>
-        </p:blipFill>
-        <p:spPr>
-          <a:xfrm>
-            <a:off x="4645152" y="1115568"/>
-            <a:ext cx="4014216" cy="2231136"/>
-          </a:xfrm>
-          <a:prstGeom prst="rect">
-            <a:avLst/>
-          </a:prstGeom>
-        </p:spPr>
-      </p:pic>
-      <p:sp>
-        <p:nvSpPr>
-          <p:cNvPr id="20" name="Text 13"/>
-          <p:cNvSpPr/>
-          <p:nvPr/>
-        </p:nvSpPr>
-        <p:spPr>
-          <a:xfrm>
-            <a:off x="4645152" y="3364992"/>
-            <a:ext cx="4014216" cy="320040"/>
-          </a:xfrm>
-          <a:prstGeom prst="rect">
-            <a:avLst/>
-          </a:prstGeom>
-          <a:noFill/>
-          <a:ln/>
-        </p:spPr>
-        <p:txBody>
-          <a:bodyPr wrap="square" lIns="0" tIns="0" rIns="0" bIns="0" rtlCol="0" anchor="t"/>
-          <a:lstStyle/>
-          <a:p>
-            <a:pPr marL="0" indent="0" algn="ctr">
-              <a:buNone/>
-            </a:pPr>
-            <a:r>
-              <a:rPr lang="en-US" sz="950" i="1" dirty="0">
-                <a:solidFill>
-                  <a:srgbClr val="CADCE6"/>
-                </a:solidFill>
-                <a:latin typeface="Calibri" pitchFamily="34" charset="0"/>
-                <a:ea typeface="Calibri" pitchFamily="34" charset="-122"/>
-                <a:cs typeface="Calibri" pitchFamily="34" charset="-120"/>
-              </a:rPr>
-              <a:t>Dashboard 7 of 7  —  Overall Threat Detection Performance</a:t>
-            </a:r>
-            <a:endParaRPr lang="en-US" sz="950" dirty="0"/>
-          </a:p>
-        </p:txBody>
-      </p:sp>
-    </p:spTree>
-  </p:cSld>
-  <p:clrMapOvr>
-    <a:masterClrMapping/>
-  </p:clrMapOvr>
-</p:sld>
-</file>
-
-<file path=ppt/slides/slide7.xml><?xml version="1.0" encoding="utf-8"?>
-<p:sld xmlns:a="http://schemas.openxmlformats.org/drawingml/2006/main" xmlns:r="http://schemas.openxmlformats.org/officeDocument/2006/relationships" xmlns:p="http://schemas.openxmlformats.org/presentationml/2006/main">
-  <p:cSld name="Slide 6">
-    <p:bg>
-      <p:bgPr>
-        <a:blipFill dpi="0" rotWithShape="1">
-          <a:blip r:embed="rId3">
-            <a:lum/>
-          </a:blip>
-          <a:srcRect/>
-          <a:stretch>
-            <a:fillRect/>
-          </a:stretch>
-        </a:blipFill>
-        <a:effectLst/>
-      </p:bgPr>
-    </p:bg>
-    <p:spTree>
-      <p:nvGrpSpPr>
-        <p:cNvPr id="1" name=""/>
-        <p:cNvGrpSpPr/>
-        <p:nvPr/>
-      </p:nvGrpSpPr>
-      <p:grpSpPr>
-        <a:xfrm>
-          <a:off x="0" y="0"/>
-          <a:ext cx="0" cy="0"/>
-          <a:chOff x="0" y="0"/>
-          <a:chExt cx="0" cy="0"/>
-        </a:xfrm>
-      </p:grpSpPr>
-      <p:sp>
-        <p:nvSpPr>
-          <p:cNvPr id="2" name="Text 0"/>
-          <p:cNvSpPr/>
-          <p:nvPr/>
-        </p:nvSpPr>
-        <p:spPr>
-          <a:xfrm>
-            <a:off x="457200" y="384048"/>
-            <a:ext cx="8229600" cy="548640"/>
-          </a:xfrm>
-          <a:prstGeom prst="rect">
-            <a:avLst/>
-          </a:prstGeom>
-          <a:noFill/>
-          <a:ln/>
-        </p:spPr>
-        <p:txBody>
-          <a:bodyPr wrap="square" lIns="0" tIns="0" rIns="0" bIns="0" rtlCol="0" anchor="ctr"/>
-          <a:lstStyle/>
-          <a:p>
-            <a:pPr marL="0" indent="0" algn="l">
-              <a:buNone/>
-            </a:pPr>
-            <a:r>
-              <a:rPr lang="en-US" sz="2600" b="1" dirty="0">
-                <a:solidFill>
-                  <a:srgbClr val="0A3D62"/>
-                </a:solidFill>
-                <a:latin typeface="Cambria" pitchFamily="34" charset="0"/>
-                <a:ea typeface="Cambria" pitchFamily="34" charset="-122"/>
-                <a:cs typeface="Cambria" pitchFamily="34" charset="-120"/>
-              </a:rPr>
-              <a:t>Conclusion</a:t>
-            </a:r>
-            <a:endParaRPr lang="en-US" sz="2600" dirty="0"/>
-          </a:p>
-        </p:txBody>
-      </p:sp>
-      <p:sp>
-        <p:nvSpPr>
-          <p:cNvPr id="3" name="Shape 1"/>
-          <p:cNvSpPr/>
-          <p:nvPr/>
-        </p:nvSpPr>
-        <p:spPr>
-          <a:xfrm>
-            <a:off x="457200" y="1051560"/>
-            <a:ext cx="8229600" cy="960120"/>
-          </a:xfrm>
-          <a:prstGeom prst="roundRect">
-            <a:avLst>
-              <a:gd name="adj" fmla="val 7619"/>
-            </a:avLst>
-          </a:prstGeom>
-          <a:solidFill>
-            <a:srgbClr val="0A3D62"/>
-          </a:solidFill>
-          <a:ln/>
-        </p:spPr>
-      </p:sp>
-      <p:sp>
-        <p:nvSpPr>
-          <p:cNvPr id="4" name="Text 2"/>
-          <p:cNvSpPr/>
-          <p:nvPr/>
-        </p:nvSpPr>
-        <p:spPr>
-          <a:xfrm>
-            <a:off x="777240" y="1051560"/>
-            <a:ext cx="7589520" cy="960120"/>
-          </a:xfrm>
-          <a:prstGeom prst="rect">
-            <a:avLst/>
-          </a:prstGeom>
-          <a:noFill/>
-          <a:ln/>
-        </p:spPr>
-        <p:txBody>
-          <a:bodyPr wrap="square" lIns="0" tIns="0" rIns="0" bIns="0" rtlCol="0" anchor="ctr"/>
-          <a:lstStyle/>
-          <a:p>
-            <a:pPr marL="0" indent="0" algn="ctr">
-              <a:lnSpc>
-                <a:spcPct val="115000"/>
-              </a:lnSpc>
-              <a:buNone/>
-            </a:pPr>
-            <a:r>
-              <a:rPr lang="en-US" sz="1350" i="1" dirty="0">
-                <a:solidFill>
-                  <a:srgbClr val="FFFFFF"/>
-                </a:solidFill>
-                <a:latin typeface="Cambria" pitchFamily="34" charset="0"/>
-                <a:ea typeface="Cambria" pitchFamily="34" charset="-122"/>
-                <a:cs typeface="Cambria" pitchFamily="34" charset="-120"/>
-              </a:rPr>
-              <a:t>Cyber Threat  Analytics Platform with Incident </a:t>
-            </a:r>
-            <a:r>
-              <a:rPr lang="en-US" sz="1350" i="1" dirty="0" err="1">
-                <a:solidFill>
-                  <a:srgbClr val="FFFFFF"/>
-                </a:solidFill>
-                <a:latin typeface="Cambria" pitchFamily="34" charset="0"/>
-                <a:ea typeface="Cambria" pitchFamily="34" charset="-122"/>
-                <a:cs typeface="Cambria" pitchFamily="34" charset="-120"/>
-              </a:rPr>
-              <a:t>Visualisation</a:t>
-            </a:r>
-            <a:r>
-              <a:rPr lang="en-US" sz="1350" i="1">
-                <a:solidFill>
-                  <a:srgbClr val="FFFFFF"/>
-                </a:solidFill>
-                <a:latin typeface="Cambria" pitchFamily="34" charset="0"/>
-                <a:ea typeface="Cambria" pitchFamily="34" charset="-122"/>
-                <a:cs typeface="Cambria" pitchFamily="34" charset="-120"/>
-              </a:rPr>
-              <a:t> System successfully </a:t>
-            </a:r>
-            <a:r>
-              <a:rPr lang="en-US" sz="1350" i="1" dirty="0">
-                <a:solidFill>
-                  <a:srgbClr val="FFFFFF"/>
-                </a:solidFill>
-                <a:latin typeface="Cambria" pitchFamily="34" charset="0"/>
-                <a:ea typeface="Cambria" pitchFamily="34" charset="-122"/>
-                <a:cs typeface="Cambria" pitchFamily="34" charset="-120"/>
-              </a:rPr>
-              <a:t>transformed raw cybersecurity threat detection logs into an interactive Power BI-based threat analytics and visualization solution.</a:t>
-            </a:r>
-            <a:endParaRPr lang="en-US" sz="1350" dirty="0"/>
-          </a:p>
-        </p:txBody>
-      </p:sp>
-      <p:sp>
-        <p:nvSpPr>
-          <p:cNvPr id="5" name="Text 3"/>
-          <p:cNvSpPr/>
-          <p:nvPr/>
-        </p:nvSpPr>
-        <p:spPr>
-          <a:xfrm>
-            <a:off x="457200" y="2286000"/>
-            <a:ext cx="3840480" cy="274320"/>
-          </a:xfrm>
-          <a:prstGeom prst="rect">
-            <a:avLst/>
-          </a:prstGeom>
-          <a:noFill/>
-          <a:ln/>
-        </p:spPr>
-        <p:txBody>
-          <a:bodyPr wrap="square" lIns="0" tIns="0" rIns="0" bIns="0" rtlCol="0" anchor="ctr"/>
-          <a:lstStyle/>
-          <a:p>
-            <a:pPr marL="0" indent="0">
-              <a:buNone/>
-            </a:pPr>
-            <a:r>
-              <a:rPr lang="en-US" sz="1200" b="1" kern="0" spc="100" dirty="0">
-                <a:solidFill>
-                  <a:srgbClr val="2AB7CA"/>
-                </a:solidFill>
-                <a:latin typeface="Calibri" pitchFamily="34" charset="0"/>
-                <a:ea typeface="Calibri" pitchFamily="34" charset="-122"/>
-                <a:cs typeface="Calibri" pitchFamily="34" charset="-120"/>
-              </a:rPr>
-              <a:t>TECHNICAL SKILLS</a:t>
-            </a:r>
-            <a:endParaRPr lang="en-US" sz="1200" dirty="0"/>
-          </a:p>
-        </p:txBody>
-      </p:sp>
-      <p:sp>
-        <p:nvSpPr>
-          <p:cNvPr id="6" name="Shape 4"/>
-          <p:cNvSpPr/>
-          <p:nvPr/>
-        </p:nvSpPr>
-        <p:spPr>
-          <a:xfrm>
-            <a:off x="457200" y="2633472"/>
-            <a:ext cx="972922" cy="402336"/>
-          </a:xfrm>
-          <a:prstGeom prst="roundRect">
-            <a:avLst>
-              <a:gd name="adj" fmla="val 50000"/>
-            </a:avLst>
-          </a:prstGeom>
-          <a:solidFill>
-            <a:srgbClr val="FFFFFF"/>
-          </a:solidFill>
-          <a:ln w="12700">
-            <a:solidFill>
-              <a:srgbClr val="0A3D62"/>
-            </a:solidFill>
-            <a:prstDash val="solid"/>
-          </a:ln>
-        </p:spPr>
-      </p:sp>
-      <p:sp>
-        <p:nvSpPr>
-          <p:cNvPr id="7" name="Text 5"/>
-          <p:cNvSpPr/>
-          <p:nvPr/>
-        </p:nvSpPr>
-        <p:spPr>
-          <a:xfrm>
-            <a:off x="457200" y="2633472"/>
-            <a:ext cx="972922" cy="402336"/>
-          </a:xfrm>
-          <a:prstGeom prst="rect">
-            <a:avLst/>
-          </a:prstGeom>
-          <a:noFill/>
-          <a:ln/>
-        </p:spPr>
-        <p:txBody>
-          <a:bodyPr wrap="square" lIns="0" tIns="0" rIns="0" bIns="0" rtlCol="0" anchor="ctr"/>
-          <a:lstStyle/>
-          <a:p>
-            <a:pPr marL="0" indent="0" algn="ctr">
-              <a:buNone/>
-            </a:pPr>
-            <a:r>
-              <a:rPr lang="en-US" sz="1050" b="1" dirty="0">
-                <a:solidFill>
-                  <a:srgbClr val="0A3D62"/>
-                </a:solidFill>
-                <a:latin typeface="Calibri" pitchFamily="34" charset="0"/>
-                <a:ea typeface="Calibri" pitchFamily="34" charset="-122"/>
-                <a:cs typeface="Calibri" pitchFamily="34" charset="-120"/>
-              </a:rPr>
-              <a:t>Power BI</a:t>
-            </a:r>
-            <a:endParaRPr lang="en-US" sz="1050" dirty="0"/>
-          </a:p>
-        </p:txBody>
-      </p:sp>
-      <p:sp>
-        <p:nvSpPr>
-          <p:cNvPr id="8" name="Shape 6"/>
-          <p:cNvSpPr/>
-          <p:nvPr/>
-        </p:nvSpPr>
-        <p:spPr>
-          <a:xfrm>
-            <a:off x="1576426" y="2633472"/>
-            <a:ext cx="1241755" cy="402336"/>
-          </a:xfrm>
-          <a:prstGeom prst="roundRect">
-            <a:avLst>
-              <a:gd name="adj" fmla="val 50000"/>
-            </a:avLst>
-          </a:prstGeom>
-          <a:solidFill>
-            <a:srgbClr val="FFFFFF"/>
-          </a:solidFill>
-          <a:ln w="12700">
-            <a:solidFill>
-              <a:srgbClr val="0A3D62"/>
-            </a:solidFill>
-            <a:prstDash val="solid"/>
-          </a:ln>
-        </p:spPr>
-      </p:sp>
-      <p:sp>
-        <p:nvSpPr>
-          <p:cNvPr id="9" name="Text 7"/>
-          <p:cNvSpPr/>
-          <p:nvPr/>
-        </p:nvSpPr>
-        <p:spPr>
-          <a:xfrm>
-            <a:off x="1576426" y="2633472"/>
-            <a:ext cx="1241755" cy="402336"/>
-          </a:xfrm>
-          <a:prstGeom prst="rect">
-            <a:avLst/>
-          </a:prstGeom>
-          <a:noFill/>
-          <a:ln/>
-        </p:spPr>
-        <p:txBody>
-          <a:bodyPr wrap="square" lIns="0" tIns="0" rIns="0" bIns="0" rtlCol="0" anchor="ctr"/>
-          <a:lstStyle/>
-          <a:p>
-            <a:pPr marL="0" indent="0" algn="ctr">
-              <a:buNone/>
-            </a:pPr>
-            <a:r>
-              <a:rPr lang="en-US" sz="1050" b="1" dirty="0">
-                <a:solidFill>
-                  <a:srgbClr val="0A3D62"/>
-                </a:solidFill>
-                <a:latin typeface="Calibri" pitchFamily="34" charset="0"/>
-                <a:ea typeface="Calibri" pitchFamily="34" charset="-122"/>
-                <a:cs typeface="Calibri" pitchFamily="34" charset="-120"/>
-              </a:rPr>
-              <a:t>Power Query</a:t>
-            </a:r>
-            <a:endParaRPr lang="en-US" sz="1050" dirty="0"/>
-          </a:p>
-        </p:txBody>
-      </p:sp>
-      <p:sp>
-        <p:nvSpPr>
-          <p:cNvPr id="10" name="Shape 8"/>
-          <p:cNvSpPr/>
-          <p:nvPr/>
-        </p:nvSpPr>
-        <p:spPr>
-          <a:xfrm>
-            <a:off x="2964485" y="2633472"/>
-            <a:ext cx="1869034" cy="402336"/>
-          </a:xfrm>
-          <a:prstGeom prst="roundRect">
-            <a:avLst>
-              <a:gd name="adj" fmla="val 50000"/>
-            </a:avLst>
-          </a:prstGeom>
-          <a:solidFill>
-            <a:srgbClr val="FFFFFF"/>
-          </a:solidFill>
-          <a:ln w="12700">
-            <a:solidFill>
-              <a:srgbClr val="0A3D62"/>
-            </a:solidFill>
-            <a:prstDash val="solid"/>
-          </a:ln>
-        </p:spPr>
-      </p:sp>
-      <p:sp>
-        <p:nvSpPr>
-          <p:cNvPr id="11" name="Text 9"/>
-          <p:cNvSpPr/>
-          <p:nvPr/>
-        </p:nvSpPr>
-        <p:spPr>
-          <a:xfrm>
-            <a:off x="2964485" y="2633472"/>
-            <a:ext cx="1869034" cy="402336"/>
-          </a:xfrm>
-          <a:prstGeom prst="rect">
-            <a:avLst/>
-          </a:prstGeom>
-          <a:noFill/>
-          <a:ln/>
-        </p:spPr>
-        <p:txBody>
-          <a:bodyPr wrap="square" lIns="0" tIns="0" rIns="0" bIns="0" rtlCol="0" anchor="ctr"/>
-          <a:lstStyle/>
-          <a:p>
-            <a:pPr marL="0" indent="0" algn="ctr">
-              <a:buNone/>
-            </a:pPr>
-            <a:r>
-              <a:rPr lang="en-US" sz="1050" b="1" dirty="0">
-                <a:solidFill>
-                  <a:srgbClr val="0A3D62"/>
-                </a:solidFill>
-                <a:latin typeface="Calibri" pitchFamily="34" charset="0"/>
-                <a:ea typeface="Calibri" pitchFamily="34" charset="-122"/>
-                <a:cs typeface="Calibri" pitchFamily="34" charset="-120"/>
-              </a:rPr>
-              <a:t>Data Preprocessing</a:t>
-            </a:r>
-            <a:endParaRPr lang="en-US" sz="1050" dirty="0"/>
-          </a:p>
-        </p:txBody>
-      </p:sp>
-      <p:sp>
-        <p:nvSpPr>
-          <p:cNvPr id="12" name="Shape 10"/>
-          <p:cNvSpPr/>
-          <p:nvPr/>
-        </p:nvSpPr>
-        <p:spPr>
-          <a:xfrm>
-            <a:off x="4979822" y="2633472"/>
-            <a:ext cx="1869034" cy="402336"/>
-          </a:xfrm>
-          <a:prstGeom prst="roundRect">
-            <a:avLst>
-              <a:gd name="adj" fmla="val 50000"/>
-            </a:avLst>
-          </a:prstGeom>
-          <a:solidFill>
-            <a:srgbClr val="FFFFFF"/>
-          </a:solidFill>
-          <a:ln w="12700">
-            <a:solidFill>
-              <a:srgbClr val="0A3D62"/>
-            </a:solidFill>
-            <a:prstDash val="solid"/>
-          </a:ln>
-        </p:spPr>
-      </p:sp>
-      <p:sp>
-        <p:nvSpPr>
-          <p:cNvPr id="13" name="Text 11"/>
-          <p:cNvSpPr/>
-          <p:nvPr/>
-        </p:nvSpPr>
-        <p:spPr>
-          <a:xfrm>
-            <a:off x="4979822" y="2633472"/>
-            <a:ext cx="1869034" cy="402336"/>
-          </a:xfrm>
-          <a:prstGeom prst="rect">
-            <a:avLst/>
-          </a:prstGeom>
-          <a:noFill/>
-          <a:ln/>
-        </p:spPr>
-        <p:txBody>
-          <a:bodyPr wrap="square" lIns="0" tIns="0" rIns="0" bIns="0" rtlCol="0" anchor="ctr"/>
-          <a:lstStyle/>
-          <a:p>
-            <a:pPr marL="0" indent="0" algn="ctr">
-              <a:buNone/>
-            </a:pPr>
-            <a:r>
-              <a:rPr lang="en-US" sz="1050" b="1" dirty="0">
-                <a:solidFill>
-                  <a:srgbClr val="0A3D62"/>
-                </a:solidFill>
-                <a:latin typeface="Calibri" pitchFamily="34" charset="0"/>
-                <a:ea typeface="Calibri" pitchFamily="34" charset="-122"/>
-                <a:cs typeface="Calibri" pitchFamily="34" charset="-120"/>
-              </a:rPr>
-              <a:t>Data Visualization</a:t>
-            </a:r>
-            <a:endParaRPr lang="en-US" sz="1050" dirty="0"/>
-          </a:p>
-        </p:txBody>
-      </p:sp>
-      <p:sp>
-        <p:nvSpPr>
-          <p:cNvPr id="14" name="Shape 12"/>
-          <p:cNvSpPr/>
-          <p:nvPr/>
-        </p:nvSpPr>
-        <p:spPr>
-          <a:xfrm>
-            <a:off x="6995160" y="2633472"/>
-            <a:ext cx="1420978" cy="402336"/>
-          </a:xfrm>
-          <a:prstGeom prst="roundRect">
-            <a:avLst>
-              <a:gd name="adj" fmla="val 50000"/>
-            </a:avLst>
-          </a:prstGeom>
-          <a:solidFill>
-            <a:srgbClr val="FFFFFF"/>
-          </a:solidFill>
-          <a:ln w="12700">
-            <a:solidFill>
-              <a:srgbClr val="0A3D62"/>
-            </a:solidFill>
-            <a:prstDash val="solid"/>
-          </a:ln>
-        </p:spPr>
-      </p:sp>
-      <p:sp>
-        <p:nvSpPr>
-          <p:cNvPr id="15" name="Text 13"/>
-          <p:cNvSpPr/>
-          <p:nvPr/>
-        </p:nvSpPr>
-        <p:spPr>
-          <a:xfrm>
-            <a:off x="6995160" y="2633472"/>
-            <a:ext cx="1420978" cy="402336"/>
-          </a:xfrm>
-          <a:prstGeom prst="rect">
-            <a:avLst/>
-          </a:prstGeom>
-          <a:noFill/>
-          <a:ln/>
-        </p:spPr>
-        <p:txBody>
-          <a:bodyPr wrap="square" lIns="0" tIns="0" rIns="0" bIns="0" rtlCol="0" anchor="ctr"/>
-          <a:lstStyle/>
-          <a:p>
-            <a:pPr marL="0" indent="0" algn="ctr">
-              <a:buNone/>
-            </a:pPr>
-            <a:r>
-              <a:rPr lang="en-US" sz="1050" b="1" dirty="0">
-                <a:solidFill>
-                  <a:srgbClr val="0A3D62"/>
-                </a:solidFill>
-                <a:latin typeface="Calibri" pitchFamily="34" charset="0"/>
-                <a:ea typeface="Calibri" pitchFamily="34" charset="-122"/>
-                <a:cs typeface="Calibri" pitchFamily="34" charset="-120"/>
-              </a:rPr>
-              <a:t>Data Analysis</a:t>
-            </a:r>
-            <a:endParaRPr lang="en-US" sz="1050" dirty="0"/>
-          </a:p>
-        </p:txBody>
-      </p:sp>
-      <p:sp>
-        <p:nvSpPr>
-          <p:cNvPr id="16" name="Text 14"/>
-          <p:cNvSpPr/>
-          <p:nvPr/>
-        </p:nvSpPr>
-        <p:spPr>
-          <a:xfrm>
-            <a:off x="457200" y="3429000"/>
-            <a:ext cx="3840480" cy="274320"/>
-          </a:xfrm>
-          <a:prstGeom prst="rect">
-            <a:avLst/>
-          </a:prstGeom>
-          <a:noFill/>
-          <a:ln/>
-        </p:spPr>
-        <p:txBody>
-          <a:bodyPr wrap="square" lIns="0" tIns="0" rIns="0" bIns="0" rtlCol="0" anchor="ctr"/>
-          <a:lstStyle/>
-          <a:p>
-            <a:pPr marL="0" indent="0">
-              <a:buNone/>
-            </a:pPr>
-            <a:r>
-              <a:rPr lang="en-US" sz="1200" b="1" kern="0" spc="100" dirty="0">
-                <a:solidFill>
-                  <a:srgbClr val="2AB7CA"/>
-                </a:solidFill>
-                <a:latin typeface="Calibri" pitchFamily="34" charset="0"/>
-                <a:ea typeface="Calibri" pitchFamily="34" charset="-122"/>
-                <a:cs typeface="Calibri" pitchFamily="34" charset="-120"/>
-              </a:rPr>
-              <a:t>SOFT SKILLS</a:t>
-            </a:r>
-            <a:endParaRPr lang="en-US" sz="1200" dirty="0"/>
-          </a:p>
-        </p:txBody>
-      </p:sp>
-      <p:sp>
-        <p:nvSpPr>
-          <p:cNvPr id="17" name="Shape 15"/>
-          <p:cNvSpPr/>
-          <p:nvPr/>
-        </p:nvSpPr>
-        <p:spPr>
-          <a:xfrm>
-            <a:off x="457200" y="3776472"/>
-            <a:ext cx="1600200" cy="402336"/>
-          </a:xfrm>
-          <a:prstGeom prst="roundRect">
-            <a:avLst>
-              <a:gd name="adj" fmla="val 50000"/>
-            </a:avLst>
-          </a:prstGeom>
-          <a:solidFill>
-            <a:srgbClr val="2AB7CA"/>
-          </a:solidFill>
-          <a:ln/>
-        </p:spPr>
-      </p:sp>
-      <p:sp>
-        <p:nvSpPr>
-          <p:cNvPr id="18" name="Text 16"/>
-          <p:cNvSpPr/>
-          <p:nvPr/>
-        </p:nvSpPr>
-        <p:spPr>
-          <a:xfrm>
-            <a:off x="457200" y="3776472"/>
-            <a:ext cx="1600200" cy="402336"/>
-          </a:xfrm>
-          <a:prstGeom prst="rect">
-            <a:avLst/>
-          </a:prstGeom>
-          <a:noFill/>
-          <a:ln/>
-        </p:spPr>
-        <p:txBody>
-          <a:bodyPr wrap="square" lIns="0" tIns="0" rIns="0" bIns="0" rtlCol="0" anchor="ctr"/>
-          <a:lstStyle/>
-          <a:p>
-            <a:pPr marL="0" indent="0" algn="ctr">
-              <a:buNone/>
-            </a:pPr>
-            <a:r>
-              <a:rPr lang="en-US" sz="1050" b="1" dirty="0">
-                <a:solidFill>
-                  <a:srgbClr val="FFFFFF"/>
-                </a:solidFill>
-                <a:latin typeface="Calibri" pitchFamily="34" charset="0"/>
-                <a:ea typeface="Calibri" pitchFamily="34" charset="-122"/>
-                <a:cs typeface="Calibri" pitchFamily="34" charset="-120"/>
-              </a:rPr>
-              <a:t>Problem Solving</a:t>
-            </a:r>
-            <a:endParaRPr lang="en-US" sz="1050" dirty="0"/>
-          </a:p>
-        </p:txBody>
-      </p:sp>
-      <p:sp>
-        <p:nvSpPr>
-          <p:cNvPr id="19" name="Shape 17"/>
-          <p:cNvSpPr/>
-          <p:nvPr/>
-        </p:nvSpPr>
-        <p:spPr>
-          <a:xfrm>
-            <a:off x="2203704" y="3776472"/>
-            <a:ext cx="1420978" cy="402336"/>
-          </a:xfrm>
-          <a:prstGeom prst="roundRect">
-            <a:avLst>
-              <a:gd name="adj" fmla="val 50000"/>
-            </a:avLst>
-          </a:prstGeom>
-          <a:solidFill>
-            <a:srgbClr val="2AB7CA"/>
-          </a:solidFill>
-          <a:ln/>
-        </p:spPr>
-      </p:sp>
-      <p:sp>
-        <p:nvSpPr>
-          <p:cNvPr id="20" name="Text 18"/>
-          <p:cNvSpPr/>
-          <p:nvPr/>
-        </p:nvSpPr>
-        <p:spPr>
-          <a:xfrm>
-            <a:off x="2203704" y="3776472"/>
-            <a:ext cx="1420978" cy="402336"/>
-          </a:xfrm>
-          <a:prstGeom prst="rect">
-            <a:avLst/>
-          </a:prstGeom>
-          <a:noFill/>
-          <a:ln/>
-        </p:spPr>
-        <p:txBody>
-          <a:bodyPr wrap="square" lIns="0" tIns="0" rIns="0" bIns="0" rtlCol="0" anchor="ctr"/>
-          <a:lstStyle/>
-          <a:p>
-            <a:pPr marL="0" indent="0" algn="ctr">
-              <a:buNone/>
-            </a:pPr>
-            <a:r>
-              <a:rPr lang="en-US" sz="1050" b="1" dirty="0">
-                <a:solidFill>
-                  <a:srgbClr val="FFFFFF"/>
-                </a:solidFill>
-                <a:latin typeface="Calibri" pitchFamily="34" charset="0"/>
-                <a:ea typeface="Calibri" pitchFamily="34" charset="-122"/>
-                <a:cs typeface="Calibri" pitchFamily="34" charset="-120"/>
-              </a:rPr>
-              <a:t>Communication</a:t>
-            </a:r>
-            <a:endParaRPr lang="en-US" sz="1050" dirty="0"/>
-          </a:p>
-        </p:txBody>
-      </p:sp>
-      <p:sp>
-        <p:nvSpPr>
-          <p:cNvPr id="21" name="Shape 19"/>
-          <p:cNvSpPr/>
-          <p:nvPr/>
-        </p:nvSpPr>
-        <p:spPr>
-          <a:xfrm>
-            <a:off x="3770986" y="3776472"/>
-            <a:ext cx="972922" cy="402336"/>
-          </a:xfrm>
-          <a:prstGeom prst="roundRect">
-            <a:avLst>
-              <a:gd name="adj" fmla="val 50000"/>
-            </a:avLst>
-          </a:prstGeom>
-          <a:solidFill>
-            <a:srgbClr val="2AB7CA"/>
-          </a:solidFill>
-          <a:ln/>
-        </p:spPr>
-      </p:sp>
-      <p:sp>
-        <p:nvSpPr>
-          <p:cNvPr id="22" name="Text 20"/>
-          <p:cNvSpPr/>
-          <p:nvPr/>
-        </p:nvSpPr>
-        <p:spPr>
-          <a:xfrm>
-            <a:off x="3770986" y="3776472"/>
-            <a:ext cx="972922" cy="402336"/>
-          </a:xfrm>
-          <a:prstGeom prst="rect">
-            <a:avLst/>
-          </a:prstGeom>
-          <a:noFill/>
-          <a:ln/>
-        </p:spPr>
-        <p:txBody>
-          <a:bodyPr wrap="square" lIns="0" tIns="0" rIns="0" bIns="0" rtlCol="0" anchor="ctr"/>
-          <a:lstStyle/>
-          <a:p>
-            <a:pPr marL="0" indent="0" algn="ctr">
-              <a:buNone/>
-            </a:pPr>
-            <a:r>
-              <a:rPr lang="en-US" sz="1050" b="1" dirty="0">
-                <a:solidFill>
-                  <a:srgbClr val="FFFFFF"/>
-                </a:solidFill>
-                <a:latin typeface="Calibri" pitchFamily="34" charset="0"/>
-                <a:ea typeface="Calibri" pitchFamily="34" charset="-122"/>
-                <a:cs typeface="Calibri" pitchFamily="34" charset="-120"/>
-              </a:rPr>
-              <a:t>Teamwork</a:t>
-            </a:r>
-            <a:endParaRPr lang="en-US" sz="1050" dirty="0"/>
-          </a:p>
-        </p:txBody>
-      </p:sp>
-      <p:sp>
-        <p:nvSpPr>
-          <p:cNvPr id="23" name="Shape 21"/>
-          <p:cNvSpPr/>
-          <p:nvPr/>
-        </p:nvSpPr>
-        <p:spPr>
-          <a:xfrm>
-            <a:off x="4890211" y="3776472"/>
-            <a:ext cx="1331366" cy="402336"/>
-          </a:xfrm>
-          <a:prstGeom prst="roundRect">
-            <a:avLst>
-              <a:gd name="adj" fmla="val 50000"/>
-            </a:avLst>
-          </a:prstGeom>
-          <a:solidFill>
-            <a:srgbClr val="2AB7CA"/>
-          </a:solidFill>
-          <a:ln/>
-        </p:spPr>
-      </p:sp>
-      <p:sp>
-        <p:nvSpPr>
-          <p:cNvPr id="24" name="Text 22"/>
-          <p:cNvSpPr/>
-          <p:nvPr/>
-        </p:nvSpPr>
-        <p:spPr>
-          <a:xfrm>
-            <a:off x="4890211" y="3776472"/>
-            <a:ext cx="1331366" cy="402336"/>
-          </a:xfrm>
-          <a:prstGeom prst="rect">
-            <a:avLst/>
-          </a:prstGeom>
-          <a:noFill/>
-          <a:ln/>
-        </p:spPr>
-        <p:txBody>
-          <a:bodyPr wrap="square" lIns="0" tIns="0" rIns="0" bIns="0" rtlCol="0" anchor="ctr"/>
-          <a:lstStyle/>
-          <a:p>
-            <a:pPr marL="0" indent="0" algn="ctr">
-              <a:buNone/>
-            </a:pPr>
-            <a:r>
-              <a:rPr lang="en-US" sz="1050" b="1" dirty="0">
-                <a:solidFill>
-                  <a:srgbClr val="FFFFFF"/>
-                </a:solidFill>
-                <a:latin typeface="Calibri" pitchFamily="34" charset="0"/>
-                <a:ea typeface="Calibri" pitchFamily="34" charset="-122"/>
-                <a:cs typeface="Calibri" pitchFamily="34" charset="-120"/>
-              </a:rPr>
-              <a:t>Presentation</a:t>
-            </a:r>
-            <a:endParaRPr lang="en-US" sz="1050" dirty="0"/>
-          </a:p>
-        </p:txBody>
-      </p:sp>
-    </p:spTree>
-  </p:cSld>
-  <p:clrMapOvr>
-    <a:masterClrMapping/>
-  </p:clrMapOvr>
-</p:sld>
-</file>
-
-<file path=ppt/slides/slide8.xml><?xml version="1.0" encoding="utf-8"?>
-<p:sld xmlns:a="http://schemas.openxmlformats.org/drawingml/2006/main" xmlns:r="http://schemas.openxmlformats.org/officeDocument/2006/relationships" xmlns:p="http://schemas.openxmlformats.org/presentationml/2006/main">
-  <p:cSld name="Slide 7">
-    <p:bg>
-      <p:bgPr>
-        <a:blipFill dpi="0" rotWithShape="1">
-          <a:blip r:embed="rId3">
-            <a:lum/>
-          </a:blip>
-          <a:srcRect/>
-          <a:stretch>
-            <a:fillRect/>
-          </a:stretch>
-        </a:blipFill>
-        <a:effectLst/>
-      </p:bgPr>
-    </p:bg>
-    <p:spTree>
-      <p:nvGrpSpPr>
-        <p:cNvPr id="1" name=""/>
-        <p:cNvGrpSpPr/>
-        <p:nvPr/>
-      </p:nvGrpSpPr>
-      <p:grpSpPr>
-        <a:xfrm>
-          <a:off x="0" y="0"/>
-          <a:ext cx="0" cy="0"/>
-          <a:chOff x="0" y="0"/>
-          <a:chExt cx="0" cy="0"/>
-        </a:xfrm>
-      </p:grpSpPr>
-      <p:sp>
-        <p:nvSpPr>
-          <p:cNvPr id="2" name="Text 0"/>
-          <p:cNvSpPr/>
-          <p:nvPr/>
-        </p:nvSpPr>
-        <p:spPr>
-          <a:xfrm>
-            <a:off x="457200" y="384048"/>
-            <a:ext cx="8229600" cy="548640"/>
-          </a:xfrm>
-          <a:prstGeom prst="rect">
-            <a:avLst/>
-          </a:prstGeom>
-          <a:noFill/>
-          <a:ln/>
-        </p:spPr>
-        <p:txBody>
-          <a:bodyPr wrap="square" lIns="0" tIns="0" rIns="0" bIns="0" rtlCol="0" anchor="ctr"/>
-          <a:lstStyle/>
-          <a:p>
-            <a:pPr marL="0" indent="0" algn="l">
-              <a:buNone/>
-            </a:pPr>
-            <a:r>
-              <a:rPr lang="en-US" sz="2600" b="1" dirty="0">
-                <a:solidFill>
-                  <a:srgbClr val="0A3D62"/>
-                </a:solidFill>
-                <a:latin typeface="Cambria" pitchFamily="34" charset="0"/>
-                <a:ea typeface="Cambria" pitchFamily="34" charset="-122"/>
-                <a:cs typeface="Cambria" pitchFamily="34" charset="-120"/>
-              </a:rPr>
-              <a:t>Acknowledgements &amp; References</a:t>
-            </a:r>
-            <a:endParaRPr lang="en-US" sz="2600" dirty="0"/>
-          </a:p>
-        </p:txBody>
-      </p:sp>
-      <p:sp>
-        <p:nvSpPr>
-          <p:cNvPr id="3" name="Shape 1"/>
-          <p:cNvSpPr/>
-          <p:nvPr/>
-        </p:nvSpPr>
-        <p:spPr>
-          <a:xfrm>
-            <a:off x="457200" y="1143000"/>
-            <a:ext cx="457200" cy="457200"/>
-          </a:xfrm>
-          <a:prstGeom prst="ellipse">
-            <a:avLst/>
-          </a:prstGeom>
-          <a:solidFill>
-            <a:srgbClr val="0A3D62"/>
-          </a:solidFill>
-          <a:ln/>
-        </p:spPr>
-      </p:sp>
-      <p:pic>
-        <p:nvPicPr>
-          <p:cNvPr id="4" name="Image 0" descr="./icons/handshake.png"/>
-          <p:cNvPicPr>
-            <a:picLocks noChangeAspect="1"/>
-          </p:cNvPicPr>
-          <p:nvPr/>
-        </p:nvPicPr>
-        <p:blipFill>
-          <a:blip r:embed="rId4"/>
-          <a:stretch>
-            <a:fillRect/>
-          </a:stretch>
-        </p:blipFill>
-        <p:spPr>
-          <a:xfrm>
-            <a:off x="566928" y="1252728"/>
-            <a:ext cx="237744" cy="237744"/>
-          </a:xfrm>
-          <a:prstGeom prst="rect">
-            <a:avLst/>
-          </a:prstGeom>
-        </p:spPr>
-      </p:pic>
-      <p:sp>
-        <p:nvSpPr>
-          <p:cNvPr id="5" name="Text 2"/>
-          <p:cNvSpPr/>
-          <p:nvPr/>
-        </p:nvSpPr>
-        <p:spPr>
-          <a:xfrm>
-            <a:off x="1051560" y="1207008"/>
-            <a:ext cx="3291840" cy="320040"/>
-          </a:xfrm>
-          <a:prstGeom prst="rect">
-            <a:avLst/>
-          </a:prstGeom>
-          <a:noFill/>
-          <a:ln/>
-        </p:spPr>
-        <p:txBody>
-          <a:bodyPr wrap="square" lIns="0" tIns="0" rIns="0" bIns="0" rtlCol="0" anchor="ctr"/>
-          <a:lstStyle/>
-          <a:p>
-            <a:pPr marL="0" indent="0">
-              <a:buNone/>
-            </a:pPr>
-            <a:r>
-              <a:rPr lang="en-US" sz="1250" b="1" kern="0" spc="50" dirty="0">
-                <a:solidFill>
-                  <a:srgbClr val="0A3D62"/>
-                </a:solidFill>
-                <a:latin typeface="Calibri" pitchFamily="34" charset="0"/>
-                <a:ea typeface="Calibri" pitchFamily="34" charset="-122"/>
-                <a:cs typeface="Calibri" pitchFamily="34" charset="-120"/>
-              </a:rPr>
-              <a:t>ACKNOWLEDGEMENTS</a:t>
-            </a:r>
-            <a:endParaRPr lang="en-US" sz="1250" dirty="0"/>
-          </a:p>
-        </p:txBody>
-      </p:sp>
-      <p:sp>
-        <p:nvSpPr>
-          <p:cNvPr id="6" name="Text 3"/>
-          <p:cNvSpPr/>
-          <p:nvPr/>
-        </p:nvSpPr>
-        <p:spPr>
-          <a:xfrm>
-            <a:off x="502920" y="1828800"/>
-            <a:ext cx="3794760" cy="2377440"/>
-          </a:xfrm>
-          <a:prstGeom prst="rect">
-            <a:avLst/>
-          </a:prstGeom>
-          <a:noFill/>
-          <a:ln/>
-        </p:spPr>
-        <p:txBody>
-          <a:bodyPr wrap="square" lIns="0" tIns="0" rIns="0" bIns="0" rtlCol="0" anchor="t"/>
-          <a:lstStyle/>
-          <a:p>
-            <a:pPr marL="177800" indent="-177800">
-              <a:lnSpc>
-                <a:spcPct val="130000"/>
-              </a:lnSpc>
-              <a:spcAft>
-                <a:spcPts val="1000"/>
-              </a:spcAft>
-              <a:buSzPct val="100000"/>
-              <a:buChar char="•"/>
-            </a:pPr>
-            <a:r>
-              <a:rPr lang="en-US" sz="1150" dirty="0">
-                <a:solidFill>
-                  <a:srgbClr val="1C2B33"/>
-                </a:solidFill>
-                <a:latin typeface="Calibri" pitchFamily="34" charset="0"/>
-                <a:ea typeface="Calibri" pitchFamily="34" charset="-122"/>
-                <a:cs typeface="Calibri" pitchFamily="34" charset="-120"/>
-              </a:rPr>
-              <a:t>Infosys SpringBoard Virtual Internship 7.0</a:t>
-            </a:r>
-            <a:endParaRPr lang="en-US" sz="1150" dirty="0"/>
-          </a:p>
-          <a:p>
-            <a:pPr marL="177800" indent="-177800">
-              <a:lnSpc>
-                <a:spcPct val="130000"/>
-              </a:lnSpc>
-              <a:spcAft>
-                <a:spcPts val="1000"/>
-              </a:spcAft>
-              <a:buSzPct val="100000"/>
-              <a:buChar char="•"/>
-            </a:pPr>
-            <a:r>
-              <a:rPr lang="en-US" sz="1150" dirty="0">
-                <a:solidFill>
-                  <a:srgbClr val="1C2B33"/>
-                </a:solidFill>
-                <a:latin typeface="Calibri" pitchFamily="34" charset="0"/>
-                <a:ea typeface="Calibri" pitchFamily="34" charset="-122"/>
-                <a:cs typeface="Calibri" pitchFamily="34" charset="-120"/>
-              </a:rPr>
-              <a:t>Mentor — Mrs. Nithayasri S J</a:t>
-            </a:r>
-            <a:endParaRPr lang="en-US" sz="1150" dirty="0"/>
-          </a:p>
-          <a:p>
-            <a:pPr marL="177800" indent="-177800">
-              <a:lnSpc>
-                <a:spcPct val="130000"/>
-              </a:lnSpc>
-              <a:spcAft>
-                <a:spcPts val="1000"/>
-              </a:spcAft>
-              <a:buSzPct val="100000"/>
-              <a:buChar char="•"/>
-            </a:pPr>
-            <a:r>
-              <a:rPr lang="en-US" sz="1150" dirty="0">
-                <a:solidFill>
-                  <a:srgbClr val="1C2B33"/>
-                </a:solidFill>
-                <a:latin typeface="Calibri" pitchFamily="34" charset="0"/>
-                <a:ea typeface="Calibri" pitchFamily="34" charset="-122"/>
-                <a:cs typeface="Calibri" pitchFamily="34" charset="-120"/>
-              </a:rPr>
-              <a:t>Team Members — Akshay Jaiswal, Srinidhi, Darsh Dwivedi, Deepan S, Harini T, Hemanth M</a:t>
-            </a:r>
-            <a:endParaRPr lang="en-US" sz="1150" dirty="0"/>
-          </a:p>
-        </p:txBody>
-      </p:sp>
-      <p:sp>
-        <p:nvSpPr>
-          <p:cNvPr id="7" name="Shape 4"/>
-          <p:cNvSpPr/>
-          <p:nvPr/>
-        </p:nvSpPr>
-        <p:spPr>
-          <a:xfrm>
-            <a:off x="4617720" y="1143000"/>
-            <a:ext cx="0" cy="3566160"/>
-          </a:xfrm>
-          <a:prstGeom prst="line">
-            <a:avLst/>
-          </a:prstGeom>
-          <a:noFill/>
-          <a:ln w="12700">
-            <a:solidFill>
-              <a:srgbClr val="D8E3E8"/>
-            </a:solidFill>
-            <a:prstDash val="solid"/>
-          </a:ln>
-        </p:spPr>
-      </p:sp>
-      <p:sp>
-        <p:nvSpPr>
-          <p:cNvPr id="8" name="Shape 5"/>
-          <p:cNvSpPr/>
-          <p:nvPr/>
-        </p:nvSpPr>
-        <p:spPr>
-          <a:xfrm>
-            <a:off x="4892040" y="1143000"/>
-            <a:ext cx="457200" cy="457200"/>
-          </a:xfrm>
-          <a:prstGeom prst="ellipse">
-            <a:avLst/>
-          </a:prstGeom>
-          <a:solidFill>
-            <a:srgbClr val="2AB7CA"/>
-          </a:solidFill>
-          <a:ln/>
-        </p:spPr>
-      </p:sp>
-      <p:pic>
-        <p:nvPicPr>
-          <p:cNvPr id="9" name="Image 1" descr="./icons/book.png"/>
-          <p:cNvPicPr>
-            <a:picLocks noChangeAspect="1"/>
-          </p:cNvPicPr>
-          <p:nvPr/>
-        </p:nvPicPr>
-        <p:blipFill>
-          <a:blip r:embed="rId5"/>
-          <a:stretch>
-            <a:fillRect/>
-          </a:stretch>
-        </p:blipFill>
-        <p:spPr>
-          <a:xfrm>
-            <a:off x="5001768" y="1252728"/>
-            <a:ext cx="237744" cy="237744"/>
-          </a:xfrm>
-          <a:prstGeom prst="rect">
-            <a:avLst/>
-          </a:prstGeom>
-        </p:spPr>
-      </p:pic>
-      <p:sp>
-        <p:nvSpPr>
-          <p:cNvPr id="10" name="Text 6"/>
-          <p:cNvSpPr/>
-          <p:nvPr/>
-        </p:nvSpPr>
-        <p:spPr>
-          <a:xfrm>
-            <a:off x="5486400" y="1207008"/>
-            <a:ext cx="3291840" cy="320040"/>
-          </a:xfrm>
-          <a:prstGeom prst="rect">
-            <a:avLst/>
-          </a:prstGeom>
-          <a:noFill/>
-          <a:ln/>
-        </p:spPr>
-        <p:txBody>
-          <a:bodyPr wrap="square" lIns="0" tIns="0" rIns="0" bIns="0" rtlCol="0" anchor="ctr"/>
-          <a:lstStyle/>
-          <a:p>
-            <a:pPr marL="0" indent="0">
-              <a:buNone/>
-            </a:pPr>
-            <a:r>
-              <a:rPr lang="en-US" sz="1250" b="1" kern="0" spc="50" dirty="0">
-                <a:solidFill>
-                  <a:srgbClr val="0A3D62"/>
-                </a:solidFill>
-                <a:latin typeface="Calibri" pitchFamily="34" charset="0"/>
-                <a:ea typeface="Calibri" pitchFamily="34" charset="-122"/>
-                <a:cs typeface="Calibri" pitchFamily="34" charset="-120"/>
-              </a:rPr>
-              <a:t>REFERENCES</a:t>
-            </a:r>
-            <a:endParaRPr lang="en-US" sz="1250" dirty="0"/>
-          </a:p>
-        </p:txBody>
-      </p:sp>
-      <p:sp>
-        <p:nvSpPr>
-          <p:cNvPr id="11" name="Text 7"/>
-          <p:cNvSpPr/>
-          <p:nvPr/>
-        </p:nvSpPr>
-        <p:spPr>
-          <a:xfrm>
-            <a:off x="4937760" y="1828800"/>
-            <a:ext cx="3794760" cy="2377440"/>
-          </a:xfrm>
-          <a:prstGeom prst="rect">
-            <a:avLst/>
-          </a:prstGeom>
-          <a:noFill/>
-          <a:ln/>
-        </p:spPr>
-        <p:txBody>
-          <a:bodyPr wrap="square" lIns="0" tIns="0" rIns="0" bIns="0" rtlCol="0" anchor="t"/>
-          <a:lstStyle/>
-          <a:p>
-            <a:pPr marL="177800" indent="-177800">
-              <a:lnSpc>
-                <a:spcPct val="130000"/>
-              </a:lnSpc>
-              <a:spcAft>
-                <a:spcPts val="1000"/>
-              </a:spcAft>
-              <a:buSzPct val="100000"/>
-              <a:buChar char="•"/>
-            </a:pPr>
-            <a:r>
-              <a:rPr lang="en-US" sz="1150" dirty="0">
-                <a:solidFill>
-                  <a:srgbClr val="1C2B33"/>
-                </a:solidFill>
-                <a:latin typeface="Calibri" pitchFamily="34" charset="0"/>
-                <a:ea typeface="Calibri" pitchFamily="34" charset="-122"/>
-                <a:cs typeface="Calibri" pitchFamily="34" charset="-120"/>
-              </a:rPr>
-              <a:t>Kaggle — Cybersecurity Threat Detection Dataset</a:t>
-            </a:r>
-            <a:endParaRPr lang="en-US" sz="1150" dirty="0"/>
-          </a:p>
-          <a:p>
-            <a:pPr marL="177800" indent="-177800">
-              <a:lnSpc>
-                <a:spcPct val="130000"/>
-              </a:lnSpc>
-              <a:spcAft>
-                <a:spcPts val="1000"/>
-              </a:spcAft>
-              <a:buSzPct val="100000"/>
-              <a:buChar char="•"/>
-            </a:pPr>
-            <a:r>
-              <a:rPr lang="en-US" sz="1150" dirty="0">
-                <a:solidFill>
-                  <a:srgbClr val="1C2B33"/>
-                </a:solidFill>
-                <a:latin typeface="Calibri" pitchFamily="34" charset="0"/>
-                <a:ea typeface="Calibri" pitchFamily="34" charset="-122"/>
-                <a:cs typeface="Calibri" pitchFamily="34" charset="-120"/>
-              </a:rPr>
-              <a:t>Power BI Official Documentation</a:t>
-            </a:r>
-            <a:endParaRPr lang="en-US" sz="1150" dirty="0"/>
-          </a:p>
-          <a:p>
-            <a:pPr marL="177800" indent="-177800">
-              <a:lnSpc>
-                <a:spcPct val="130000"/>
-              </a:lnSpc>
-              <a:spcAft>
-                <a:spcPts val="1000"/>
-              </a:spcAft>
-              <a:buSzPct val="100000"/>
-              <a:buChar char="•"/>
-            </a:pPr>
-            <a:r>
-              <a:rPr lang="en-US" sz="1150" dirty="0">
-                <a:solidFill>
-                  <a:srgbClr val="1C2B33"/>
-                </a:solidFill>
-                <a:latin typeface="Calibri" pitchFamily="34" charset="0"/>
-                <a:ea typeface="Calibri" pitchFamily="34" charset="-122"/>
-                <a:cs typeface="Calibri" pitchFamily="34" charset="-120"/>
-              </a:rPr>
-              <a:t>Power Query Documentation</a:t>
-            </a:r>
-            <a:endParaRPr lang="en-US" sz="1150" dirty="0"/>
-          </a:p>
-          <a:p>
-            <a:pPr marL="177800" indent="-177800">
-              <a:lnSpc>
-                <a:spcPct val="130000"/>
-              </a:lnSpc>
-              <a:spcAft>
-                <a:spcPts val="1000"/>
-              </a:spcAft>
-              <a:buSzPct val="100000"/>
-              <a:buChar char="•"/>
-            </a:pPr>
-            <a:r>
-              <a:rPr lang="en-US" sz="1150" dirty="0">
-                <a:solidFill>
-                  <a:srgbClr val="1C2B33"/>
-                </a:solidFill>
-                <a:latin typeface="Calibri" pitchFamily="34" charset="0"/>
-                <a:ea typeface="Calibri" pitchFamily="34" charset="-122"/>
-                <a:cs typeface="Calibri" pitchFamily="34" charset="-120"/>
-              </a:rPr>
-              <a:t>Infosys Springboard Training &amp; Internship Materials</a:t>
-            </a:r>
-            <a:endParaRPr lang="en-US" sz="1150" dirty="0"/>
-          </a:p>
-        </p:txBody>
-      </p:sp>
-    </p:spTree>
-  </p:cSld>
-  <p:clrMapOvr>
-    <a:masterClrMapping/>
-  </p:clrMapOvr>
-</p:sld>
-</file>
-
-<file path=ppt/slides/slide9.xml><?xml version="1.0" encoding="utf-8"?>
-<p:sld xmlns:a="http://schemas.openxmlformats.org/drawingml/2006/main" xmlns:r="http://schemas.openxmlformats.org/officeDocument/2006/relationships" xmlns:p="http://schemas.openxmlformats.org/presentationml/2006/main">
-  <p:cSld name="Slide 8">
-    <p:bg>
-      <p:bgPr>
-        <a:solidFill>
-          <a:srgbClr val="0A3D62"/>
-        </a:solidFill>
-        <a:effectLst/>
-      </p:bgPr>
-    </p:bg>
-    <p:spTree>
-      <p:nvGrpSpPr>
-        <p:cNvPr id="1" name=""/>
-        <p:cNvGrpSpPr/>
-        <p:nvPr/>
-      </p:nvGrpSpPr>
-      <p:grpSpPr>
-        <a:xfrm>
-          <a:off x="0" y="0"/>
-          <a:ext cx="0" cy="0"/>
-          <a:chOff x="0" y="0"/>
-          <a:chExt cx="0" cy="0"/>
-        </a:xfrm>
-      </p:grpSpPr>
-      <p:sp>
-        <p:nvSpPr>
-          <p:cNvPr id="2" name="Shape 0"/>
-          <p:cNvSpPr/>
-          <p:nvPr/>
-        </p:nvSpPr>
-        <p:spPr>
-          <a:xfrm>
-            <a:off x="4160520" y="1234440"/>
-            <a:ext cx="822960" cy="822960"/>
-          </a:xfrm>
-          <a:prstGeom prst="ellipse">
-            <a:avLst/>
-          </a:prstGeom>
-          <a:solidFill>
-            <a:srgbClr val="2AB7CA"/>
-          </a:solidFill>
-          <a:ln/>
-        </p:spPr>
-      </p:sp>
-      <p:pic>
-        <p:nvPicPr>
-          <p:cNvPr id="3" name="Image 0" descr="./icons/shieldalt.png"/>
-          <p:cNvPicPr>
-            <a:picLocks noChangeAspect="1"/>
-          </p:cNvPicPr>
-          <p:nvPr/>
-        </p:nvPicPr>
-        <p:blipFill>
-          <a:blip r:embed="rId3"/>
-          <a:stretch>
-            <a:fillRect/>
-          </a:stretch>
-        </p:blipFill>
-        <p:spPr>
-          <a:xfrm>
-            <a:off x="4358030" y="1431950"/>
-            <a:ext cx="427939" cy="427939"/>
-          </a:xfrm>
-          <a:prstGeom prst="rect">
-            <a:avLst/>
-          </a:prstGeom>
-        </p:spPr>
-      </p:pic>
-      <p:sp>
-        <p:nvSpPr>
-          <p:cNvPr id="4" name="Text 1"/>
-          <p:cNvSpPr/>
-          <p:nvPr/>
-        </p:nvSpPr>
-        <p:spPr>
-          <a:xfrm>
-            <a:off x="457200" y="2331720"/>
-            <a:ext cx="8229600" cy="822960"/>
-          </a:xfrm>
-          <a:prstGeom prst="rect">
-            <a:avLst/>
-          </a:prstGeom>
-          <a:noFill/>
-          <a:ln/>
-        </p:spPr>
-        <p:txBody>
-          <a:bodyPr wrap="square" lIns="0" tIns="0" rIns="0" bIns="0" rtlCol="0" anchor="ctr"/>
-          <a:lstStyle/>
-          <a:p>
-            <a:pPr marL="0" indent="0" algn="ctr">
-              <a:buNone/>
-            </a:pPr>
-            <a:r>
-              <a:rPr lang="en-US" sz="4000" b="1" dirty="0">
-                <a:solidFill>
-                  <a:srgbClr val="FFFFFF"/>
-                </a:solidFill>
-                <a:latin typeface="Cambria" pitchFamily="34" charset="0"/>
-                <a:ea typeface="Cambria" pitchFamily="34" charset="-122"/>
-                <a:cs typeface="Cambria" pitchFamily="34" charset="-120"/>
-              </a:rPr>
-              <a:t>Thank You</a:t>
-            </a:r>
-            <a:endParaRPr lang="en-US" sz="4000" dirty="0"/>
-          </a:p>
-        </p:txBody>
-      </p:sp>
-      <p:sp>
-        <p:nvSpPr>
-          <p:cNvPr id="5" name="Text 2"/>
-          <p:cNvSpPr/>
-          <p:nvPr/>
-        </p:nvSpPr>
-        <p:spPr>
-          <a:xfrm>
-            <a:off x="457200" y="3200400"/>
-            <a:ext cx="8229600" cy="365760"/>
-          </a:xfrm>
-          <a:prstGeom prst="rect">
-            <a:avLst/>
-          </a:prstGeom>
-          <a:noFill/>
-          <a:ln/>
-        </p:spPr>
-        <p:txBody>
-          <a:bodyPr wrap="square" lIns="0" tIns="0" rIns="0" bIns="0" rtlCol="0" anchor="ctr"/>
-          <a:lstStyle/>
-          <a:p>
-            <a:pPr marL="0" indent="0" algn="ctr">
-              <a:buNone/>
-            </a:pPr>
-            <a:endParaRPr lang="en-US" sz="1400" dirty="0"/>
           </a:p>
         </p:txBody>
       </p:sp>
